--- a/BugDetector_Presentation.pptx
+++ b/BugDetector_Presentation.pptx
@@ -5,43 +5,43 @@
     <p:sldMasterId id="2147484030" r:id="rId1"/>
   </p:sldMasterIdLst>
   <p:notesMasterIdLst>
-    <p:notesMasterId r:id="rId30"/>
+    <p:notesMasterId r:id="rId33"/>
   </p:notesMasterIdLst>
   <p:handoutMasterIdLst>
-    <p:handoutMasterId r:id="rId31"/>
+    <p:handoutMasterId r:id="rId34"/>
   </p:handoutMasterIdLst>
   <p:sldIdLst>
     <p:sldId id="415" r:id="rId2"/>
     <p:sldId id="256" r:id="rId3"/>
-    <p:sldId id="416" r:id="rId11"/>
-    <p:sldId id="417" r:id="rId12"/>
-    <p:sldId id="418" r:id="rId13"/>
-    <p:sldId id="419" r:id="rId14"/>
-    <p:sldId id="420" r:id="rId15"/>
-    <p:sldId id="421" r:id="rId16"/>
-    <p:sldId id="422" r:id="rId17"/>
-    <p:sldId id="423" r:id="rId18"/>
-    <p:sldId id="424" r:id="rId19"/>
-    <p:sldId id="425" r:id="rId20"/>
-    <p:sldId id="426" r:id="rId21"/>
-    <p:sldId id="427" r:id="rId22"/>
-    <p:sldId id="428" r:id="rId23"/>
-    <p:sldId id="429" r:id="rId24"/>
-    <p:sldId id="430" r:id="rId25"/>
-    <p:sldId id="431" r:id="rId26"/>
-    <p:sldId id="432" r:id="rId27"/>
-    <p:sldId id="433" r:id="rId28"/>
-    <p:sldId id="434" r:id="rId29"/>
-    <p:sldId id="435" r:id="rId10"/>
-    <p:sldId id="436" r:id="rId9"/>
-    <p:sldId id="437" r:id="rId8"/>
-    <p:sldId id="438" r:id="rId7"/>
-    <p:sldId id="439" r:id="rId6"/>
-    <p:sldId id="440" r:id="rId5"/>
-    <p:sldId id="441" r:id="rId4"/>
-    <p:sldId id="442" r:id="rId37"/>
-    <p:sldId id="443" r:id="rId38"/>
-    <p:sldId id="444" r:id="rId39"/>
+    <p:sldId id="416" r:id="rId4"/>
+    <p:sldId id="417" r:id="rId5"/>
+    <p:sldId id="418" r:id="rId6"/>
+    <p:sldId id="419" r:id="rId7"/>
+    <p:sldId id="420" r:id="rId8"/>
+    <p:sldId id="421" r:id="rId9"/>
+    <p:sldId id="422" r:id="rId10"/>
+    <p:sldId id="423" r:id="rId11"/>
+    <p:sldId id="424" r:id="rId12"/>
+    <p:sldId id="425" r:id="rId13"/>
+    <p:sldId id="426" r:id="rId14"/>
+    <p:sldId id="427" r:id="rId15"/>
+    <p:sldId id="428" r:id="rId16"/>
+    <p:sldId id="429" r:id="rId17"/>
+    <p:sldId id="430" r:id="rId18"/>
+    <p:sldId id="431" r:id="rId19"/>
+    <p:sldId id="432" r:id="rId20"/>
+    <p:sldId id="433" r:id="rId21"/>
+    <p:sldId id="434" r:id="rId22"/>
+    <p:sldId id="435" r:id="rId23"/>
+    <p:sldId id="436" r:id="rId24"/>
+    <p:sldId id="437" r:id="rId25"/>
+    <p:sldId id="438" r:id="rId26"/>
+    <p:sldId id="439" r:id="rId27"/>
+    <p:sldId id="440" r:id="rId28"/>
+    <p:sldId id="441" r:id="rId29"/>
+    <p:sldId id="442" r:id="rId30"/>
+    <p:sldId id="443" r:id="rId31"/>
+    <p:sldId id="444" r:id="rId32"/>
   </p:sldIdLst>
   <p:sldSz cx="12192000" cy="6858000"/>
   <p:notesSz cx="7010400" cy="9296400"/>
@@ -254,7 +254,7 @@
             <a:fld id="{73B9BF8B-5DE5-4683-9086-813D7D9D9C2C}" type="datetimeFigureOut">
               <a:rPr lang="en-US" smtClean="0"/>
               <a:pPr/>
-              <a:t>6/16/2025</a:t>
+              <a:t>27/05/2026</a:t>
             </a:fld>
             <a:endParaRPr lang="en-US"/>
           </a:p>
@@ -421,7 +421,7 @@
             <a:fld id="{FF7E6EC3-2045-4E0B-AEC9-6D8FD25FE102}" type="datetimeFigureOut">
               <a:rPr lang="en-US" smtClean="0"/>
               <a:pPr/>
-              <a:t>6/16/2025</a:t>
+              <a:t>27/05/2026</a:t>
             </a:fld>
             <a:endParaRPr lang="en-US"/>
           </a:p>
@@ -1008,7 +1008,7 @@
           <a:p>
             <a:fld id="{E2958715-E9F5-4077-9CFA-A1C12B9697F1}" type="datetime13">
               <a:rPr lang="en-US" smtClean="0"/>
-              <a:t>11:48:14 AM</a:t>
+              <a:t>12:09:42 AM</a:t>
             </a:fld>
             <a:endParaRPr lang="en-US"/>
           </a:p>
@@ -1235,7 +1235,7 @@
           <a:p>
             <a:fld id="{CBCF0641-80D5-40A5-B5EC-B45E055A1B6E}" type="datetime13">
               <a:rPr lang="en-US" smtClean="0"/>
-              <a:t>11:48:14 AM</a:t>
+              <a:t>12:09:43 AM</a:t>
             </a:fld>
             <a:endParaRPr lang="en-US"/>
           </a:p>
@@ -1536,7 +1536,7 @@
           <a:p>
             <a:fld id="{497CAE6B-F049-43EC-BD2A-C3C56FC34BAE}" type="datetime13">
               <a:rPr lang="en-US" smtClean="0"/>
-              <a:t>11:48:14 AM</a:t>
+              <a:t>12:09:43 AM</a:t>
             </a:fld>
             <a:endParaRPr lang="en-US"/>
           </a:p>
@@ -1764,7 +1764,7 @@
           <a:p>
             <a:fld id="{8A8067C8-3610-4B30-90BD-B62F52802A82}" type="datetime13">
               <a:rPr lang="en-US" smtClean="0"/>
-              <a:t>11:48:14 AM</a:t>
+              <a:t>12:09:43 AM</a:t>
             </a:fld>
             <a:endParaRPr lang="en-US"/>
           </a:p>
@@ -2196,7 +2196,7 @@
           <a:p>
             <a:fld id="{8E55EF7E-3664-411B-B17D-47435194F3C2}" type="datetime13">
               <a:rPr lang="en-US" smtClean="0"/>
-              <a:t>11:48:14 AM</a:t>
+              <a:t>12:09:43 AM</a:t>
             </a:fld>
             <a:endParaRPr lang="en-US"/>
           </a:p>
@@ -2493,7 +2493,7 @@
           <a:p>
             <a:fld id="{ADC66968-D469-4BB3-AE8F-6DAE79F12CC6}" type="datetime13">
               <a:rPr lang="en-US" smtClean="0"/>
-              <a:t>11:48:14 AM</a:t>
+              <a:t>12:09:43 AM</a:t>
             </a:fld>
             <a:endParaRPr lang="en-US"/>
           </a:p>
@@ -2917,7 +2917,7 @@
           <a:p>
             <a:fld id="{7268E905-6BF1-4944-9429-EF971271A1F9}" type="datetime13">
               <a:rPr lang="en-US" smtClean="0"/>
-              <a:t>11:48:14 AM</a:t>
+              <a:t>12:09:43 AM</a:t>
             </a:fld>
             <a:endParaRPr lang="en-US"/>
           </a:p>
@@ -3080,7 +3080,7 @@
           <a:p>
             <a:fld id="{C727AB41-863D-41C8-8A35-611CCBAFCBC6}" type="datetime13">
               <a:rPr lang="en-US" smtClean="0"/>
-              <a:t>11:48:14 AM</a:t>
+              <a:t>12:09:43 AM</a:t>
             </a:fld>
             <a:endParaRPr lang="en-US"/>
           </a:p>
@@ -3296,7 +3296,7 @@
           <a:p>
             <a:fld id="{394D167E-8919-484F-A388-D38791552CD5}" type="datetime13">
               <a:rPr lang="en-US" smtClean="0"/>
-              <a:t>11:48:14 AM</a:t>
+              <a:t>12:09:43 AM</a:t>
             </a:fld>
             <a:endParaRPr lang="en-US"/>
           </a:p>
@@ -3678,7 +3678,7 @@
           <a:p>
             <a:fld id="{9C470322-69F3-46DF-BAEB-71916444555A}" type="datetime13">
               <a:rPr lang="en-US" smtClean="0"/>
-              <a:t>11:48:14 AM</a:t>
+              <a:t>12:09:43 AM</a:t>
             </a:fld>
             <a:endParaRPr lang="en-US"/>
           </a:p>
@@ -4079,7 +4079,7 @@
           <a:p>
             <a:fld id="{BBFEC683-AD33-4FE9-86A8-FC89A0F20670}" type="datetime13">
               <a:rPr lang="en-US" smtClean="0"/>
-              <a:t>11:48:14 AM</a:t>
+              <a:t>12:09:43 AM</a:t>
             </a:fld>
             <a:endParaRPr lang="en-US"/>
           </a:p>
@@ -5022,7 +5022,7 @@
 </file>
 
 <file path=ppt/slides/slide10.xml><?xml version="1.0" encoding="utf-8"?>
-<p:sld xmlns:a="http://schemas.openxmlformats.org/drawingml/2006/main" xmlns:p="http://schemas.openxmlformats.org/presentationml/2006/main" xmlns:r="http://schemas.openxmlformats.org/officeDocument/2006/relationships">
+<p:sld xmlns:a="http://schemas.openxmlformats.org/drawingml/2006/main" xmlns:r="http://schemas.openxmlformats.org/officeDocument/2006/relationships" xmlns:p="http://schemas.openxmlformats.org/presentationml/2006/main">
   <p:cSld>
     <p:spTree>
       <p:nvGrpSpPr>
@@ -5030,7 +5030,14 @@
         <p:cNvGrpSpPr/>
         <p:nvPr/>
       </p:nvGrpSpPr>
-      <p:grpSpPr/>
+      <p:grpSpPr>
+        <a:xfrm>
+          <a:off x="0" y="0"/>
+          <a:ext cx="0" cy="0"/>
+          <a:chOff x="0" y="0"/>
+          <a:chExt cx="0" cy="0"/>
+        </a:xfrm>
+      </p:grpSpPr>
       <p:sp>
         <p:nvSpPr>
           <p:cNvPr id="2" name="Rectangle 1"/>
@@ -5067,7 +5074,7 @@
           </a:fontRef>
         </p:style>
         <p:txBody>
-          <a:bodyPr rtlCol="0" anchor="ctr" wrap="none"/>
+          <a:bodyPr wrap="none" rtlCol="0" anchor="ctr"/>
           <a:lstStyle/>
           <a:p>
             <a:pPr algn="ctr"/>
@@ -5122,6 +5129,7 @@
           <a:lstStyle/>
           <a:p>
             <a:pPr algn="ctr"/>
+            <a:endParaRPr/>
           </a:p>
         </p:txBody>
       </p:sp>
@@ -5168,7 +5176,7 @@
 </file>
 
 <file path=ppt/slides/slide11.xml><?xml version="1.0" encoding="utf-8"?>
-<p:sld xmlns:a="http://schemas.openxmlformats.org/drawingml/2006/main" xmlns:p="http://schemas.openxmlformats.org/presentationml/2006/main" xmlns:r="http://schemas.openxmlformats.org/officeDocument/2006/relationships">
+<p:sld xmlns:a="http://schemas.openxmlformats.org/drawingml/2006/main" xmlns:r="http://schemas.openxmlformats.org/officeDocument/2006/relationships" xmlns:p="http://schemas.openxmlformats.org/presentationml/2006/main">
   <p:cSld>
     <p:spTree>
       <p:nvGrpSpPr>
@@ -5176,7 +5184,14 @@
         <p:cNvGrpSpPr/>
         <p:nvPr/>
       </p:nvGrpSpPr>
-      <p:grpSpPr/>
+      <p:grpSpPr>
+        <a:xfrm>
+          <a:off x="0" y="0"/>
+          <a:ext cx="0" cy="0"/>
+          <a:chOff x="0" y="0"/>
+          <a:chExt cx="0" cy="0"/>
+        </a:xfrm>
+      </p:grpSpPr>
       <p:sp>
         <p:nvSpPr>
           <p:cNvPr id="2" name="TextBox 1"/>
@@ -5251,6 +5266,7 @@
           <a:lstStyle/>
           <a:p>
             <a:pPr algn="ctr"/>
+            <a:endParaRPr/>
           </a:p>
         </p:txBody>
       </p:sp>
@@ -5290,7 +5306,7 @@
           </a:fontRef>
         </p:style>
         <p:txBody>
-          <a:bodyPr rtlCol="0" anchor="ctr" wrap="none"/>
+          <a:bodyPr wrap="none" rtlCol="0" anchor="ctr"/>
           <a:lstStyle/>
           <a:p>
             <a:pPr algn="ctr"/>
@@ -5347,13 +5363,25 @@
                 <a:spcPts val="200"/>
               </a:spcBef>
             </a:pPr>
+            <a:endParaRPr sz="1400" b="1">
+              <a:solidFill>
+                <a:srgbClr val="0070C0"/>
+              </a:solidFill>
+            </a:endParaRPr>
+          </a:p>
+          <a:p>
+            <a:pPr algn="l">
+              <a:spcBef>
+                <a:spcPts val="200"/>
+              </a:spcBef>
+            </a:pPr>
             <a:r>
               <a:rPr sz="1400" b="0">
                 <a:solidFill>
                   <a:srgbClr val="404040"/>
                 </a:solidFill>
               </a:rPr>
-              <a:t/>
+              <a:t>File name:  nasa_combined.csv</a:t>
             </a:r>
           </a:p>
           <a:p>
@@ -5368,7 +5396,7 @@
                   <a:srgbClr val="404040"/>
                 </a:solidFill>
               </a:rPr>
-              <a:t>File name:  nasa_combined.csv</a:t>
+              <a:t>Source: NASA publicly released real project data</a:t>
             </a:r>
           </a:p>
           <a:p>
@@ -5383,7 +5411,7 @@
                   <a:srgbClr val="404040"/>
                 </a:solidFill>
               </a:rPr>
-              <a:t>Source: NASA publicly released real project data</a:t>
+              <a:t>Contains data from real NASA space software</a:t>
             </a:r>
           </a:p>
           <a:p>
@@ -5398,21 +5426,6 @@
                   <a:srgbClr val="404040"/>
                 </a:solidFill>
               </a:rPr>
-              <a:t>Contains data from real NASA space software</a:t>
-            </a:r>
-          </a:p>
-          <a:p>
-            <a:pPr algn="l">
-              <a:spcBef>
-                <a:spcPts val="200"/>
-              </a:spcBef>
-            </a:pPr>
-            <a:r>
-              <a:rPr sz="1400" b="0">
-                <a:solidFill>
-                  <a:srgbClr val="404040"/>
-                </a:solidFill>
-              </a:rPr>
               <a:t>Tells the AI: Is this file buggy or clean? (Yes/No)</a:t>
             </a:r>
           </a:p>
@@ -5422,14 +5435,11 @@
                 <a:spcPts val="200"/>
               </a:spcBef>
             </a:pPr>
-            <a:r>
-              <a:rPr sz="1400" b="0">
-                <a:solidFill>
-                  <a:srgbClr val="404040"/>
-                </a:solidFill>
-              </a:rPr>
-              <a:t/>
-            </a:r>
+            <a:endParaRPr sz="1400" b="0">
+              <a:solidFill>
+                <a:srgbClr val="404040"/>
+              </a:solidFill>
+            </a:endParaRPr>
           </a:p>
           <a:p>
             <a:pPr algn="l">
@@ -5490,14 +5500,11 @@
                 <a:spcPts val="200"/>
               </a:spcBef>
             </a:pPr>
-            <a:r>
-              <a:rPr sz="1400" b="0">
-                <a:solidFill>
-                  <a:srgbClr val="404040"/>
-                </a:solidFill>
-              </a:rPr>
-              <a:t/>
-            </a:r>
+            <a:endParaRPr sz="1400" b="1">
+              <a:solidFill>
+                <a:srgbClr val="0070C0"/>
+              </a:solidFill>
+            </a:endParaRPr>
           </a:p>
           <a:p>
             <a:pPr algn="l">
@@ -5661,6 +5668,7 @@
           <a:lstStyle/>
           <a:p>
             <a:pPr algn="ctr"/>
+            <a:endParaRPr/>
           </a:p>
         </p:txBody>
       </p:sp>
@@ -5673,7 +5681,7 @@
 </file>
 
 <file path=ppt/slides/slide12.xml><?xml version="1.0" encoding="utf-8"?>
-<p:sld xmlns:a="http://schemas.openxmlformats.org/drawingml/2006/main" xmlns:p="http://schemas.openxmlformats.org/presentationml/2006/main" xmlns:r="http://schemas.openxmlformats.org/officeDocument/2006/relationships">
+<p:sld xmlns:a="http://schemas.openxmlformats.org/drawingml/2006/main" xmlns:r="http://schemas.openxmlformats.org/officeDocument/2006/relationships" xmlns:p="http://schemas.openxmlformats.org/presentationml/2006/main">
   <p:cSld>
     <p:spTree>
       <p:nvGrpSpPr>
@@ -5681,7 +5689,14 @@
         <p:cNvGrpSpPr/>
         <p:nvPr/>
       </p:nvGrpSpPr>
-      <p:grpSpPr/>
+      <p:grpSpPr>
+        <a:xfrm>
+          <a:off x="0" y="0"/>
+          <a:ext cx="0" cy="0"/>
+          <a:chOff x="0" y="0"/>
+          <a:chExt cx="0" cy="0"/>
+        </a:xfrm>
+      </p:grpSpPr>
       <p:sp>
         <p:nvSpPr>
           <p:cNvPr id="2" name="Rectangle 1"/>
@@ -5718,7 +5733,7 @@
           </a:fontRef>
         </p:style>
         <p:txBody>
-          <a:bodyPr rtlCol="0" anchor="ctr" wrap="none"/>
+          <a:bodyPr wrap="none" rtlCol="0" anchor="ctr"/>
           <a:lstStyle/>
           <a:p>
             <a:pPr algn="ctr"/>
@@ -5773,6 +5788,7 @@
           <a:lstStyle/>
           <a:p>
             <a:pPr algn="ctr"/>
+            <a:endParaRPr/>
           </a:p>
         </p:txBody>
       </p:sp>
@@ -5819,7 +5835,7 @@
 </file>
 
 <file path=ppt/slides/slide13.xml><?xml version="1.0" encoding="utf-8"?>
-<p:sld xmlns:a="http://schemas.openxmlformats.org/drawingml/2006/main" xmlns:p="http://schemas.openxmlformats.org/presentationml/2006/main" xmlns:r="http://schemas.openxmlformats.org/officeDocument/2006/relationships">
+<p:sld xmlns:a="http://schemas.openxmlformats.org/drawingml/2006/main" xmlns:r="http://schemas.openxmlformats.org/officeDocument/2006/relationships" xmlns:p="http://schemas.openxmlformats.org/presentationml/2006/main">
   <p:cSld>
     <p:spTree>
       <p:nvGrpSpPr>
@@ -5827,7 +5843,14 @@
         <p:cNvGrpSpPr/>
         <p:nvPr/>
       </p:nvGrpSpPr>
-      <p:grpSpPr/>
+      <p:grpSpPr>
+        <a:xfrm>
+          <a:off x="0" y="0"/>
+          <a:ext cx="0" cy="0"/>
+          <a:chOff x="0" y="0"/>
+          <a:chExt cx="0" cy="0"/>
+        </a:xfrm>
+      </p:grpSpPr>
       <p:sp>
         <p:nvSpPr>
           <p:cNvPr id="2" name="TextBox 1"/>
@@ -5902,6 +5925,7 @@
           <a:lstStyle/>
           <a:p>
             <a:pPr algn="ctr"/>
+            <a:endParaRPr/>
           </a:p>
         </p:txBody>
       </p:sp>
@@ -5941,7 +5965,7 @@
           </a:fontRef>
         </p:style>
         <p:txBody>
-          <a:bodyPr rtlCol="0" anchor="ctr" wrap="none"/>
+          <a:bodyPr wrap="none" rtlCol="0" anchor="ctr"/>
           <a:lstStyle/>
           <a:p>
             <a:pPr algn="ctr"/>
@@ -6013,28 +6037,40 @@
                 <a:spcPts val="200"/>
               </a:spcBef>
             </a:pPr>
+            <a:endParaRPr sz="1400" b="0">
+              <a:solidFill>
+                <a:srgbClr val="404040"/>
+              </a:solidFill>
+            </a:endParaRPr>
+          </a:p>
+          <a:p>
+            <a:pPr algn="l">
+              <a:spcBef>
+                <a:spcPts val="200"/>
+              </a:spcBef>
+            </a:pPr>
+            <a:r>
+              <a:rPr sz="1400" b="1">
+                <a:solidFill>
+                  <a:srgbClr val="0070C0"/>
+                </a:solidFill>
+              </a:rPr>
+              <a:t>How was it built?</a:t>
+            </a:r>
+          </a:p>
+          <a:p>
+            <a:pPr algn="l">
+              <a:spcBef>
+                <a:spcPts val="200"/>
+              </a:spcBef>
+            </a:pPr>
             <a:r>
               <a:rPr sz="1400" b="0">
                 <a:solidFill>
                   <a:srgbClr val="404040"/>
                 </a:solidFill>
               </a:rPr>
-              <a:t/>
-            </a:r>
-          </a:p>
-          <a:p>
-            <a:pPr algn="l">
-              <a:spcBef>
-                <a:spcPts val="200"/>
-              </a:spcBef>
-            </a:pPr>
-            <a:r>
-              <a:rPr sz="1400" b="1">
-                <a:solidFill>
-                  <a:srgbClr val="0070C0"/>
-                </a:solidFill>
-              </a:rPr>
-              <a:t>How was it built?</a:t>
+              <a:t>    We trained 3 AI algorithms together (called an 'Ensemble'):</a:t>
             </a:r>
           </a:p>
           <a:p>
@@ -6049,7 +6085,7 @@
                   <a:srgbClr val="404040"/>
                 </a:solidFill>
               </a:rPr>
-              <a:t>    We trained 3 AI algorithms together (called an 'Ensemble'):</a:t>
+              <a:t>    XGBoost — A very powerful prediction algorithm (weight: 3)</a:t>
             </a:r>
           </a:p>
           <a:p>
@@ -6064,7 +6100,7 @@
                   <a:srgbClr val="404040"/>
                 </a:solidFill>
               </a:rPr>
-              <a:t>    XGBoost — A very powerful prediction algorithm (weight: 3)</a:t>
+              <a:t>    Random Forest — Like a group of experts voting together (weight: 2)</a:t>
             </a:r>
           </a:p>
           <a:p>
@@ -6079,7 +6115,7 @@
                   <a:srgbClr val="404040"/>
                 </a:solidFill>
               </a:rPr>
-              <a:t>    Random Forest — Like a group of experts voting together (weight: 2)</a:t>
+              <a:t>    Gradient Boosting — Learns from past mistakes step by step (weight: 2)</a:t>
             </a:r>
           </a:p>
           <a:p>
@@ -6094,21 +6130,6 @@
                   <a:srgbClr val="404040"/>
                 </a:solidFill>
               </a:rPr>
-              <a:t>    Gradient Boosting — Learns from past mistakes step by step (weight: 2)</a:t>
-            </a:r>
-          </a:p>
-          <a:p>
-            <a:pPr algn="l">
-              <a:spcBef>
-                <a:spcPts val="200"/>
-              </a:spcBef>
-            </a:pPr>
-            <a:r>
-              <a:rPr sz="1400" b="0">
-                <a:solidFill>
-                  <a:srgbClr val="404040"/>
-                </a:solidFill>
-              </a:rPr>
               <a:t>    Combining all 3 gives much better accuracy than one alone.</a:t>
             </a:r>
           </a:p>
@@ -6118,14 +6139,11 @@
                 <a:spcPts val="200"/>
               </a:spcBef>
             </a:pPr>
-            <a:r>
-              <a:rPr sz="1400" b="0">
-                <a:solidFill>
-                  <a:srgbClr val="404040"/>
-                </a:solidFill>
-              </a:rPr>
-              <a:t/>
-            </a:r>
+            <a:endParaRPr sz="1400" b="0">
+              <a:solidFill>
+                <a:srgbClr val="404040"/>
+              </a:solidFill>
+            </a:endParaRPr>
           </a:p>
           <a:p>
             <a:pPr algn="l">
@@ -6222,7 +6240,7 @@
 </file>
 
 <file path=ppt/slides/slide14.xml><?xml version="1.0" encoding="utf-8"?>
-<p:sld xmlns:a="http://schemas.openxmlformats.org/drawingml/2006/main" xmlns:p="http://schemas.openxmlformats.org/presentationml/2006/main" xmlns:r="http://schemas.openxmlformats.org/officeDocument/2006/relationships">
+<p:sld xmlns:a="http://schemas.openxmlformats.org/drawingml/2006/main" xmlns:r="http://schemas.openxmlformats.org/officeDocument/2006/relationships" xmlns:p="http://schemas.openxmlformats.org/presentationml/2006/main">
   <p:cSld>
     <p:spTree>
       <p:nvGrpSpPr>
@@ -6230,7 +6248,14 @@
         <p:cNvGrpSpPr/>
         <p:nvPr/>
       </p:nvGrpSpPr>
-      <p:grpSpPr/>
+      <p:grpSpPr>
+        <a:xfrm>
+          <a:off x="0" y="0"/>
+          <a:ext cx="0" cy="0"/>
+          <a:chOff x="0" y="0"/>
+          <a:chExt cx="0" cy="0"/>
+        </a:xfrm>
+      </p:grpSpPr>
       <p:sp>
         <p:nvSpPr>
           <p:cNvPr id="2" name="TextBox 1"/>
@@ -6305,6 +6330,7 @@
           <a:lstStyle/>
           <a:p>
             <a:pPr algn="ctr"/>
+            <a:endParaRPr/>
           </a:p>
         </p:txBody>
       </p:sp>
@@ -6344,7 +6370,7 @@
           </a:fontRef>
         </p:style>
         <p:txBody>
-          <a:bodyPr rtlCol="0" anchor="ctr" wrap="none"/>
+          <a:bodyPr wrap="none" rtlCol="0" anchor="ctr"/>
           <a:lstStyle/>
           <a:p>
             <a:pPr algn="ctr"/>
@@ -6416,14 +6442,98 @@
                 <a:spcPts val="200"/>
               </a:spcBef>
             </a:pPr>
+            <a:endParaRPr sz="1400" b="0">
+              <a:solidFill>
+                <a:srgbClr val="404040"/>
+              </a:solidFill>
+            </a:endParaRPr>
+          </a:p>
+          <a:p>
+            <a:pPr algn="l">
+              <a:spcBef>
+                <a:spcPts val="200"/>
+              </a:spcBef>
+            </a:pPr>
+            <a:r>
+              <a:rPr sz="1400" b="1">
+                <a:solidFill>
+                  <a:srgbClr val="0070C0"/>
+                </a:solidFill>
+              </a:rPr>
+              <a:t>4 Bug Types it identifies:</a:t>
+            </a:r>
+          </a:p>
+          <a:p>
+            <a:pPr algn="l">
+              <a:spcBef>
+                <a:spcPts val="200"/>
+              </a:spcBef>
+            </a:pPr>
             <a:r>
               <a:rPr sz="1400" b="0">
                 <a:solidFill>
                   <a:srgbClr val="404040"/>
                 </a:solidFill>
               </a:rPr>
-              <a:t/>
-            </a:r>
+              <a:t>    Crash Bug         The app will stop working / crash completely</a:t>
+            </a:r>
+          </a:p>
+          <a:p>
+            <a:pPr algn="l">
+              <a:spcBef>
+                <a:spcPts val="200"/>
+              </a:spcBef>
+            </a:pPr>
+            <a:r>
+              <a:rPr sz="1400" b="0">
+                <a:solidFill>
+                  <a:srgbClr val="404040"/>
+                </a:solidFill>
+              </a:rPr>
+              <a:t>    Logical Bug       Wrong answer, incorrect calculation, wrong output</a:t>
+            </a:r>
+          </a:p>
+          <a:p>
+            <a:pPr algn="l">
+              <a:spcBef>
+                <a:spcPts val="200"/>
+              </a:spcBef>
+            </a:pPr>
+            <a:r>
+              <a:rPr sz="1400" b="0">
+                <a:solidFill>
+                  <a:srgbClr val="404040"/>
+                </a:solidFill>
+              </a:rPr>
+              <a:t>    Performance Bug   App runs slowly or uses too much memory</a:t>
+            </a:r>
+          </a:p>
+          <a:p>
+            <a:pPr algn="l">
+              <a:spcBef>
+                <a:spcPts val="200"/>
+              </a:spcBef>
+            </a:pPr>
+            <a:r>
+              <a:rPr sz="1400" b="0">
+                <a:solidFill>
+                  <a:srgbClr val="404040"/>
+                </a:solidFill>
+              </a:rPr>
+              <a:t>    UI Bug            Something looks wrong on the screen</a:t>
+            </a:r>
+          </a:p>
+          <a:p>
+            <a:pPr algn="l">
+              <a:spcBef>
+                <a:spcPts val="200"/>
+              </a:spcBef>
+            </a:pPr>
+            <a:endParaRPr sz="1400" b="0">
+              <a:solidFill>
+                <a:srgbClr val="404040"/>
+              </a:solidFill>
+            </a:endParaRPr>
           </a:p>
           <a:p>
             <a:pPr algn="l">
@@ -6437,7 +6547,7 @@
                   <a:srgbClr val="0070C0"/>
                 </a:solidFill>
               </a:rPr>
-              <a:t>4 Bug Types it identifies:</a:t>
+              <a:t>Algorithm used:</a:t>
             </a:r>
           </a:p>
           <a:p>
@@ -6452,96 +6562,6 @@
                   <a:srgbClr val="404040"/>
                 </a:solidFill>
               </a:rPr>
-              <a:t>    Crash Bug         The app will stop working / crash completely</a:t>
-            </a:r>
-          </a:p>
-          <a:p>
-            <a:pPr algn="l">
-              <a:spcBef>
-                <a:spcPts val="200"/>
-              </a:spcBef>
-            </a:pPr>
-            <a:r>
-              <a:rPr sz="1400" b="0">
-                <a:solidFill>
-                  <a:srgbClr val="404040"/>
-                </a:solidFill>
-              </a:rPr>
-              <a:t>    Logical Bug       Wrong answer, incorrect calculation, wrong output</a:t>
-            </a:r>
-          </a:p>
-          <a:p>
-            <a:pPr algn="l">
-              <a:spcBef>
-                <a:spcPts val="200"/>
-              </a:spcBef>
-            </a:pPr>
-            <a:r>
-              <a:rPr sz="1400" b="0">
-                <a:solidFill>
-                  <a:srgbClr val="404040"/>
-                </a:solidFill>
-              </a:rPr>
-              <a:t>    Performance Bug   App runs slowly or uses too much memory</a:t>
-            </a:r>
-          </a:p>
-          <a:p>
-            <a:pPr algn="l">
-              <a:spcBef>
-                <a:spcPts val="200"/>
-              </a:spcBef>
-            </a:pPr>
-            <a:r>
-              <a:rPr sz="1400" b="0">
-                <a:solidFill>
-                  <a:srgbClr val="404040"/>
-                </a:solidFill>
-              </a:rPr>
-              <a:t>    UI Bug            Something looks wrong on the screen</a:t>
-            </a:r>
-          </a:p>
-          <a:p>
-            <a:pPr algn="l">
-              <a:spcBef>
-                <a:spcPts val="200"/>
-              </a:spcBef>
-            </a:pPr>
-            <a:r>
-              <a:rPr sz="1400" b="0">
-                <a:solidFill>
-                  <a:srgbClr val="404040"/>
-                </a:solidFill>
-              </a:rPr>
-              <a:t/>
-            </a:r>
-          </a:p>
-          <a:p>
-            <a:pPr algn="l">
-              <a:spcBef>
-                <a:spcPts val="200"/>
-              </a:spcBef>
-            </a:pPr>
-            <a:r>
-              <a:rPr sz="1400" b="1">
-                <a:solidFill>
-                  <a:srgbClr val="0070C0"/>
-                </a:solidFill>
-              </a:rPr>
-              <a:t>Algorithm used:</a:t>
-            </a:r>
-          </a:p>
-          <a:p>
-            <a:pPr algn="l">
-              <a:spcBef>
-                <a:spcPts val="200"/>
-              </a:spcBef>
-            </a:pPr>
-            <a:r>
-              <a:rPr sz="1400" b="0">
-                <a:solidFill>
-                  <a:srgbClr val="404040"/>
-                </a:solidFill>
-              </a:rPr>
               <a:t>    Random Forest Classifier — a group of decision trees voting together</a:t>
             </a:r>
           </a:p>
@@ -6551,14 +6571,11 @@
                 <a:spcPts val="200"/>
               </a:spcBef>
             </a:pPr>
-            <a:r>
-              <a:rPr sz="1400" b="0">
-                <a:solidFill>
-                  <a:srgbClr val="404040"/>
-                </a:solidFill>
-              </a:rPr>
-              <a:t/>
-            </a:r>
+            <a:endParaRPr sz="1400" b="0">
+              <a:solidFill>
+                <a:srgbClr val="404040"/>
+              </a:solidFill>
+            </a:endParaRPr>
           </a:p>
           <a:p>
             <a:pPr algn="l">
@@ -6625,7 +6642,7 @@
 </file>
 
 <file path=ppt/slides/slide15.xml><?xml version="1.0" encoding="utf-8"?>
-<p:sld xmlns:a="http://schemas.openxmlformats.org/drawingml/2006/main" xmlns:p="http://schemas.openxmlformats.org/presentationml/2006/main" xmlns:r="http://schemas.openxmlformats.org/officeDocument/2006/relationships">
+<p:sld xmlns:a="http://schemas.openxmlformats.org/drawingml/2006/main" xmlns:r="http://schemas.openxmlformats.org/officeDocument/2006/relationships" xmlns:p="http://schemas.openxmlformats.org/presentationml/2006/main">
   <p:cSld>
     <p:spTree>
       <p:nvGrpSpPr>
@@ -6633,7 +6650,14 @@
         <p:cNvGrpSpPr/>
         <p:nvPr/>
       </p:nvGrpSpPr>
-      <p:grpSpPr/>
+      <p:grpSpPr>
+        <a:xfrm>
+          <a:off x="0" y="0"/>
+          <a:ext cx="0" cy="0"/>
+          <a:chOff x="0" y="0"/>
+          <a:chExt cx="0" cy="0"/>
+        </a:xfrm>
+      </p:grpSpPr>
       <p:sp>
         <p:nvSpPr>
           <p:cNvPr id="2" name="TextBox 1"/>
@@ -6708,6 +6732,7 @@
           <a:lstStyle/>
           <a:p>
             <a:pPr algn="ctr"/>
+            <a:endParaRPr/>
           </a:p>
         </p:txBody>
       </p:sp>
@@ -6747,7 +6772,7 @@
           </a:fontRef>
         </p:style>
         <p:txBody>
-          <a:bodyPr rtlCol="0" anchor="ctr" wrap="none"/>
+          <a:bodyPr wrap="none" rtlCol="0" anchor="ctr"/>
           <a:lstStyle/>
           <a:p>
             <a:pPr algn="ctr"/>
@@ -6819,13 +6844,25 @@
                 <a:spcPts val="200"/>
               </a:spcBef>
             </a:pPr>
+            <a:endParaRPr sz="1500" b="0">
+              <a:solidFill>
+                <a:srgbClr val="404040"/>
+              </a:solidFill>
+            </a:endParaRPr>
+          </a:p>
+          <a:p>
+            <a:pPr algn="l">
+              <a:spcBef>
+                <a:spcPts val="200"/>
+              </a:spcBef>
+            </a:pPr>
             <a:r>
               <a:rPr sz="1500" b="0">
                 <a:solidFill>
                   <a:srgbClr val="404040"/>
                 </a:solidFill>
               </a:rPr>
-              <a:t/>
+              <a:t>WMC  — Code complexity (most important!)</a:t>
             </a:r>
           </a:p>
           <a:p>
@@ -6840,7 +6877,7 @@
                   <a:srgbClr val="404040"/>
                 </a:solidFill>
               </a:rPr>
-              <a:t>WMC  — Code complexity (most important!)</a:t>
+              <a:t>LOC  — Total lines of code</a:t>
             </a:r>
           </a:p>
           <a:p>
@@ -6855,7 +6892,7 @@
                   <a:srgbClr val="404040"/>
                 </a:solidFill>
               </a:rPr>
-              <a:t>LOC  — Total lines of code</a:t>
+              <a:t>CBO  — Number of connections to other code files</a:t>
             </a:r>
           </a:p>
           <a:p>
@@ -6870,7 +6907,7 @@
                   <a:srgbClr val="404040"/>
                 </a:solidFill>
               </a:rPr>
-              <a:t>CBO  — Number of connections to other code files</a:t>
+              <a:t>DIT  — Depth of class inheritance</a:t>
             </a:r>
           </a:p>
           <a:p>
@@ -6885,21 +6922,6 @@
                   <a:srgbClr val="404040"/>
                 </a:solidFill>
               </a:rPr>
-              <a:t>DIT  — Depth of class inheritance</a:t>
-            </a:r>
-          </a:p>
-          <a:p>
-            <a:pPr algn="l">
-              <a:spcBef>
-                <a:spcPts val="200"/>
-              </a:spcBef>
-            </a:pPr>
-            <a:r>
-              <a:rPr sz="1500" b="0">
-                <a:solidFill>
-                  <a:srgbClr val="404040"/>
-                </a:solidFill>
-              </a:rPr>
               <a:t>RFC  — How many different functions are called</a:t>
             </a:r>
           </a:p>
@@ -6909,14 +6931,11 @@
                 <a:spcPts val="200"/>
               </a:spcBef>
             </a:pPr>
-            <a:r>
-              <a:rPr sz="1500" b="0">
-                <a:solidFill>
-                  <a:srgbClr val="404040"/>
-                </a:solidFill>
-              </a:rPr>
-              <a:t/>
-            </a:r>
+            <a:endParaRPr sz="1500" b="0">
+              <a:solidFill>
+                <a:srgbClr val="404040"/>
+              </a:solidFill>
+            </a:endParaRPr>
           </a:p>
           <a:p>
             <a:pPr algn="l">
@@ -6983,7 +7002,7 @@
 </file>
 
 <file path=ppt/slides/slide16.xml><?xml version="1.0" encoding="utf-8"?>
-<p:sld xmlns:a="http://schemas.openxmlformats.org/drawingml/2006/main" xmlns:p="http://schemas.openxmlformats.org/presentationml/2006/main" xmlns:r="http://schemas.openxmlformats.org/officeDocument/2006/relationships">
+<p:sld xmlns:a="http://schemas.openxmlformats.org/drawingml/2006/main" xmlns:r="http://schemas.openxmlformats.org/officeDocument/2006/relationships" xmlns:p="http://schemas.openxmlformats.org/presentationml/2006/main">
   <p:cSld>
     <p:spTree>
       <p:nvGrpSpPr>
@@ -6991,7 +7010,14 @@
         <p:cNvGrpSpPr/>
         <p:nvPr/>
       </p:nvGrpSpPr>
-      <p:grpSpPr/>
+      <p:grpSpPr>
+        <a:xfrm>
+          <a:off x="0" y="0"/>
+          <a:ext cx="0" cy="0"/>
+          <a:chOff x="0" y="0"/>
+          <a:chExt cx="0" cy="0"/>
+        </a:xfrm>
+      </p:grpSpPr>
       <p:sp>
         <p:nvSpPr>
           <p:cNvPr id="2" name="TextBox 1"/>
@@ -7066,6 +7092,7 @@
           <a:lstStyle/>
           <a:p>
             <a:pPr algn="ctr"/>
+            <a:endParaRPr/>
           </a:p>
         </p:txBody>
       </p:sp>
@@ -7105,7 +7132,7 @@
           </a:fontRef>
         </p:style>
         <p:txBody>
-          <a:bodyPr rtlCol="0" anchor="ctr" wrap="none"/>
+          <a:bodyPr wrap="none" rtlCol="0" anchor="ctr"/>
           <a:lstStyle/>
           <a:p>
             <a:pPr algn="ctr"/>
@@ -7192,28 +7219,40 @@
                 <a:spcPts val="200"/>
               </a:spcBef>
             </a:pPr>
+            <a:endParaRPr sz="1500" b="0">
+              <a:solidFill>
+                <a:srgbClr val="404040"/>
+              </a:solidFill>
+            </a:endParaRPr>
+          </a:p>
+          <a:p>
+            <a:pPr algn="l">
+              <a:spcBef>
+                <a:spcPts val="200"/>
+              </a:spcBef>
+            </a:pPr>
+            <a:r>
+              <a:rPr sz="1500" b="1">
+                <a:solidFill>
+                  <a:srgbClr val="0070C0"/>
+                </a:solidFill>
+              </a:rPr>
+              <a:t>What does it add on top of our ML models?</a:t>
+            </a:r>
+          </a:p>
+          <a:p>
+            <a:pPr algn="l">
+              <a:spcBef>
+                <a:spcPts val="200"/>
+              </a:spcBef>
+            </a:pPr>
             <a:r>
               <a:rPr sz="1500" b="0">
                 <a:solidFill>
                   <a:srgbClr val="404040"/>
                 </a:solidFill>
               </a:rPr>
-              <a:t/>
-            </a:r>
-          </a:p>
-          <a:p>
-            <a:pPr algn="l">
-              <a:spcBef>
-                <a:spcPts val="200"/>
-              </a:spcBef>
-            </a:pPr>
-            <a:r>
-              <a:rPr sz="1500" b="1">
-                <a:solidFill>
-                  <a:srgbClr val="0070C0"/>
-                </a:solidFill>
-              </a:rPr>
-              <a:t>What does it add on top of our ML models?</a:t>
+              <a:t>    Enhanced Description  — A clear 2-sentence explanation of the bug</a:t>
             </a:r>
           </a:p>
           <a:p>
@@ -7228,7 +7267,7 @@
                   <a:srgbClr val="404040"/>
                 </a:solidFill>
               </a:rPr>
-              <a:t>    Enhanced Description  — A clear 2-sentence explanation of the bug</a:t>
+              <a:t>    Technical Reason      — Why the AI flagged this specific code</a:t>
             </a:r>
           </a:p>
           <a:p>
@@ -7243,7 +7282,7 @@
                   <a:srgbClr val="404040"/>
                 </a:solidFill>
               </a:rPr>
-              <a:t>    Technical Reason      — Why the AI flagged this specific code</a:t>
+              <a:t>    Corrected Code        — The actual fixed version of the buggy line</a:t>
             </a:r>
           </a:p>
           <a:p>
@@ -7258,21 +7297,6 @@
                   <a:srgbClr val="404040"/>
                 </a:solidFill>
               </a:rPr>
-              <a:t>    Corrected Code        — The actual fixed version of the buggy line</a:t>
-            </a:r>
-          </a:p>
-          <a:p>
-            <a:pPr algn="l">
-              <a:spcBef>
-                <a:spcPts val="200"/>
-              </a:spcBef>
-            </a:pPr>
-            <a:r>
-              <a:rPr sz="1500" b="0">
-                <a:solidFill>
-                  <a:srgbClr val="404040"/>
-                </a:solidFill>
-              </a:rPr>
               <a:t>    Fix Explanation       — What was changed and why</a:t>
             </a:r>
           </a:p>
@@ -7282,14 +7306,11 @@
                 <a:spcPts val="200"/>
               </a:spcBef>
             </a:pPr>
-            <a:r>
-              <a:rPr sz="1500" b="0">
-                <a:solidFill>
-                  <a:srgbClr val="404040"/>
-                </a:solidFill>
-              </a:rPr>
-              <a:t/>
-            </a:r>
+            <a:endParaRPr sz="1500" b="0">
+              <a:solidFill>
+                <a:srgbClr val="404040"/>
+              </a:solidFill>
+            </a:endParaRPr>
           </a:p>
           <a:p>
             <a:pPr algn="l">
@@ -7376,7 +7397,7 @@
           </a:fontRef>
         </p:style>
         <p:txBody>
-          <a:bodyPr rtlCol="0" anchor="ctr" wrap="square"/>
+          <a:bodyPr wrap="square" rtlCol="0" anchor="ctr"/>
           <a:lstStyle/>
           <a:p>
             <a:pPr algn="l"/>
@@ -7390,13 +7411,20 @@
             </a:r>
           </a:p>
           <a:p>
+            <a:endParaRPr sz="1300" b="1">
+              <a:solidFill>
+                <a:srgbClr val="7C3AED"/>
+              </a:solidFill>
+            </a:endParaRPr>
+          </a:p>
+          <a:p>
             <a:r>
               <a:rPr sz="1200">
                 <a:solidFill>
                   <a:srgbClr val="404040"/>
                 </a:solidFill>
               </a:rPr>
-              <a:t/>
+              <a:t>Bug found: Null Pointer</a:t>
             </a:r>
           </a:p>
           <a:p>
@@ -7406,8 +7434,15 @@
                   <a:srgbClr val="404040"/>
                 </a:solidFill>
               </a:rPr>
-              <a:t>Bug found: Null Pointer</a:t>
-            </a:r>
+              <a:t>at line 45</a:t>
+            </a:r>
+          </a:p>
+          <a:p>
+            <a:endParaRPr sz="1200">
+              <a:solidFill>
+                <a:srgbClr val="404040"/>
+              </a:solidFill>
+            </a:endParaRPr>
           </a:p>
           <a:p>
             <a:r>
@@ -7416,7 +7451,7 @@
                   <a:srgbClr val="404040"/>
                 </a:solidFill>
               </a:rPr>
-              <a:t>at line 45</a:t>
+              <a:t>Fixed code:</a:t>
             </a:r>
           </a:p>
           <a:p>
@@ -7426,38 +7461,15 @@
                   <a:srgbClr val="404040"/>
                 </a:solidFill>
               </a:rPr>
-              <a:t/>
-            </a:r>
-          </a:p>
-          <a:p>
-            <a:r>
-              <a:rPr sz="1200">
-                <a:solidFill>
-                  <a:srgbClr val="404040"/>
-                </a:solidFill>
-              </a:rPr>
-              <a:t>Fixed code:</a:t>
-            </a:r>
-          </a:p>
-          <a:p>
-            <a:r>
-              <a:rPr sz="1200">
-                <a:solidFill>
-                  <a:srgbClr val="404040"/>
-                </a:solidFill>
-              </a:rPr>
               <a:t>if (obj != null) {</a:t>
             </a:r>
           </a:p>
           <a:p>
-            <a:r>
-              <a:rPr sz="1200">
-                <a:solidFill>
-                  <a:srgbClr val="404040"/>
-                </a:solidFill>
-              </a:rPr>
-              <a:t/>
-            </a:r>
+            <a:endParaRPr sz="1200">
+              <a:solidFill>
+                <a:srgbClr val="404040"/>
+              </a:solidFill>
+            </a:endParaRPr>
           </a:p>
           <a:p>
             <a:r>
@@ -7490,7 +7502,7 @@
 </file>
 
 <file path=ppt/slides/slide17.xml><?xml version="1.0" encoding="utf-8"?>
-<p:sld xmlns:a="http://schemas.openxmlformats.org/drawingml/2006/main" xmlns:p="http://schemas.openxmlformats.org/presentationml/2006/main" xmlns:r="http://schemas.openxmlformats.org/officeDocument/2006/relationships">
+<p:sld xmlns:a="http://schemas.openxmlformats.org/drawingml/2006/main" xmlns:r="http://schemas.openxmlformats.org/officeDocument/2006/relationships" xmlns:p="http://schemas.openxmlformats.org/presentationml/2006/main">
   <p:cSld>
     <p:spTree>
       <p:nvGrpSpPr>
@@ -7498,7 +7510,14 @@
         <p:cNvGrpSpPr/>
         <p:nvPr/>
       </p:nvGrpSpPr>
-      <p:grpSpPr/>
+      <p:grpSpPr>
+        <a:xfrm>
+          <a:off x="0" y="0"/>
+          <a:ext cx="0" cy="0"/>
+          <a:chOff x="0" y="0"/>
+          <a:chExt cx="0" cy="0"/>
+        </a:xfrm>
+      </p:grpSpPr>
       <p:sp>
         <p:nvSpPr>
           <p:cNvPr id="2" name="Rectangle 1"/>
@@ -7535,7 +7554,7 @@
           </a:fontRef>
         </p:style>
         <p:txBody>
-          <a:bodyPr rtlCol="0" anchor="ctr" wrap="none"/>
+          <a:bodyPr wrap="none" rtlCol="0" anchor="ctr"/>
           <a:lstStyle/>
           <a:p>
             <a:pPr algn="ctr"/>
@@ -7590,6 +7609,7 @@
           <a:lstStyle/>
           <a:p>
             <a:pPr algn="ctr"/>
+            <a:endParaRPr/>
           </a:p>
         </p:txBody>
       </p:sp>
@@ -7636,7 +7656,7 @@
 </file>
 
 <file path=ppt/slides/slide18.xml><?xml version="1.0" encoding="utf-8"?>
-<p:sld xmlns:a="http://schemas.openxmlformats.org/drawingml/2006/main" xmlns:p="http://schemas.openxmlformats.org/presentationml/2006/main" xmlns:r="http://schemas.openxmlformats.org/officeDocument/2006/relationships">
+<p:sld xmlns:a="http://schemas.openxmlformats.org/drawingml/2006/main" xmlns:r="http://schemas.openxmlformats.org/officeDocument/2006/relationships" xmlns:p="http://schemas.openxmlformats.org/presentationml/2006/main">
   <p:cSld>
     <p:spTree>
       <p:nvGrpSpPr>
@@ -7644,7 +7664,14 @@
         <p:cNvGrpSpPr/>
         <p:nvPr/>
       </p:nvGrpSpPr>
-      <p:grpSpPr/>
+      <p:grpSpPr>
+        <a:xfrm>
+          <a:off x="0" y="0"/>
+          <a:ext cx="0" cy="0"/>
+          <a:chOff x="0" y="0"/>
+          <a:chExt cx="0" cy="0"/>
+        </a:xfrm>
+      </p:grpSpPr>
       <p:sp>
         <p:nvSpPr>
           <p:cNvPr id="2" name="TextBox 1"/>
@@ -7719,6 +7746,7 @@
           <a:lstStyle/>
           <a:p>
             <a:pPr algn="ctr"/>
+            <a:endParaRPr/>
           </a:p>
         </p:txBody>
       </p:sp>
@@ -7758,7 +7786,7 @@
           </a:fontRef>
         </p:style>
         <p:txBody>
-          <a:bodyPr rtlCol="0" anchor="ctr" wrap="none"/>
+          <a:bodyPr wrap="none" rtlCol="0" anchor="ctr"/>
           <a:lstStyle/>
           <a:p>
             <a:pPr algn="ctr"/>
@@ -7815,27 +7843,24 @@
                 <a:spcPts val="200"/>
               </a:spcBef>
             </a:pPr>
+            <a:endParaRPr sz="1600" b="0">
+              <a:solidFill>
+                <a:srgbClr val="404040"/>
+              </a:solidFill>
+            </a:endParaRPr>
+          </a:p>
+          <a:p>
+            <a:pPr algn="l">
+              <a:spcBef>
+                <a:spcPts val="200"/>
+              </a:spcBef>
+            </a:pPr>
             <a:r>
               <a:rPr sz="1600" b="0">
                 <a:solidFill>
                   <a:srgbClr val="404040"/>
                 </a:solidFill>
               </a:rPr>
-              <a:t/>
-            </a:r>
-          </a:p>
-          <a:p>
-            <a:pPr algn="l">
-              <a:spcBef>
-                <a:spcPts val="200"/>
-              </a:spcBef>
-            </a:pPr>
-            <a:r>
-              <a:rPr sz="1600" b="0">
-                <a:solidFill>
-                  <a:srgbClr val="404040"/>
-                </a:solidFill>
-              </a:rPr>
               <a:t>Login securely — passwords are encrypted.</a:t>
             </a:r>
           </a:p>
@@ -7845,14 +7870,11 @@
                 <a:spcPts val="200"/>
               </a:spcBef>
             </a:pPr>
-            <a:r>
-              <a:rPr sz="1600" b="0">
-                <a:solidFill>
-                  <a:srgbClr val="404040"/>
-                </a:solidFill>
-              </a:rPr>
-              <a:t/>
-            </a:r>
+            <a:endParaRPr sz="1600" b="0">
+              <a:solidFill>
+                <a:srgbClr val="404040"/>
+              </a:solidFill>
+            </a:endParaRPr>
           </a:p>
           <a:p>
             <a:pPr algn="l">
@@ -7928,7 +7950,7 @@
 </file>
 
 <file path=ppt/slides/slide19.xml><?xml version="1.0" encoding="utf-8"?>
-<p:sld xmlns:a="http://schemas.openxmlformats.org/drawingml/2006/main" xmlns:p="http://schemas.openxmlformats.org/presentationml/2006/main" xmlns:r="http://schemas.openxmlformats.org/officeDocument/2006/relationships">
+<p:sld xmlns:a="http://schemas.openxmlformats.org/drawingml/2006/main" xmlns:r="http://schemas.openxmlformats.org/officeDocument/2006/relationships" xmlns:p="http://schemas.openxmlformats.org/presentationml/2006/main">
   <p:cSld>
     <p:spTree>
       <p:nvGrpSpPr>
@@ -7936,7 +7958,14 @@
         <p:cNvGrpSpPr/>
         <p:nvPr/>
       </p:nvGrpSpPr>
-      <p:grpSpPr/>
+      <p:grpSpPr>
+        <a:xfrm>
+          <a:off x="0" y="0"/>
+          <a:ext cx="0" cy="0"/>
+          <a:chOff x="0" y="0"/>
+          <a:chExt cx="0" cy="0"/>
+        </a:xfrm>
+      </p:grpSpPr>
       <p:sp>
         <p:nvSpPr>
           <p:cNvPr id="2" name="TextBox 1"/>
@@ -8011,6 +8040,7 @@
           <a:lstStyle/>
           <a:p>
             <a:pPr algn="ctr"/>
+            <a:endParaRPr/>
           </a:p>
         </p:txBody>
       </p:sp>
@@ -8050,7 +8080,7 @@
           </a:fontRef>
         </p:style>
         <p:txBody>
-          <a:bodyPr rtlCol="0" anchor="ctr" wrap="none"/>
+          <a:bodyPr wrap="none" rtlCol="0" anchor="ctr"/>
           <a:lstStyle/>
           <a:p>
             <a:pPr algn="ctr"/>
@@ -8167,14 +8197,11 @@
                 <a:spcPts val="200"/>
               </a:spcBef>
             </a:pPr>
-            <a:r>
-              <a:rPr sz="1500" b="0">
-                <a:solidFill>
-                  <a:srgbClr val="404040"/>
-                </a:solidFill>
-              </a:rPr>
-              <a:t/>
-            </a:r>
+            <a:endParaRPr sz="1500" b="0">
+              <a:solidFill>
+                <a:srgbClr val="404040"/>
+              </a:solidFill>
+            </a:endParaRPr>
           </a:p>
           <a:p>
             <a:pPr algn="l">
@@ -8314,7 +8341,7 @@
                   <a:srgbClr val="0070C0"/>
                 </a:solidFill>
               </a:rPr>
-              <a:t>Group Members:  Zainab  |  Shahzaman  |  [Team Member]</a:t>
+              <a:t>Group Members:  Zainab  |  Hamna  |  </a:t>
             </a:r>
           </a:p>
           <a:p>
@@ -8422,7 +8449,7 @@
 </file>
 
 <file path=ppt/slides/slide20.xml><?xml version="1.0" encoding="utf-8"?>
-<p:sld xmlns:a="http://schemas.openxmlformats.org/drawingml/2006/main" xmlns:p="http://schemas.openxmlformats.org/presentationml/2006/main" xmlns:r="http://schemas.openxmlformats.org/officeDocument/2006/relationships">
+<p:sld xmlns:a="http://schemas.openxmlformats.org/drawingml/2006/main" xmlns:r="http://schemas.openxmlformats.org/officeDocument/2006/relationships" xmlns:p="http://schemas.openxmlformats.org/presentationml/2006/main">
   <p:cSld>
     <p:spTree>
       <p:nvGrpSpPr>
@@ -8430,7 +8457,14 @@
         <p:cNvGrpSpPr/>
         <p:nvPr/>
       </p:nvGrpSpPr>
-      <p:grpSpPr/>
+      <p:grpSpPr>
+        <a:xfrm>
+          <a:off x="0" y="0"/>
+          <a:ext cx="0" cy="0"/>
+          <a:chOff x="0" y="0"/>
+          <a:chExt cx="0" cy="0"/>
+        </a:xfrm>
+      </p:grpSpPr>
       <p:sp>
         <p:nvSpPr>
           <p:cNvPr id="2" name="TextBox 1"/>
@@ -8505,6 +8539,7 @@
           <a:lstStyle/>
           <a:p>
             <a:pPr algn="ctr"/>
+            <a:endParaRPr/>
           </a:p>
         </p:txBody>
       </p:sp>
@@ -8544,7 +8579,7 @@
           </a:fontRef>
         </p:style>
         <p:txBody>
-          <a:bodyPr rtlCol="0" anchor="ctr" wrap="none"/>
+          <a:bodyPr wrap="none" rtlCol="0" anchor="ctr"/>
           <a:lstStyle/>
           <a:p>
             <a:pPr algn="ctr"/>
@@ -8646,14 +8681,11 @@
                 <a:spcPts val="200"/>
               </a:spcBef>
             </a:pPr>
-            <a:r>
-              <a:rPr sz="1500" b="0">
-                <a:solidFill>
-                  <a:srgbClr val="404040"/>
-                </a:solidFill>
-              </a:rPr>
-              <a:t/>
-            </a:r>
+            <a:endParaRPr sz="1500" b="0">
+              <a:solidFill>
+                <a:srgbClr val="404040"/>
+              </a:solidFill>
+            </a:endParaRPr>
           </a:p>
           <a:p>
             <a:pPr algn="l">
@@ -8735,7 +8767,7 @@
 </file>
 
 <file path=ppt/slides/slide21.xml><?xml version="1.0" encoding="utf-8"?>
-<p:sld xmlns:a="http://schemas.openxmlformats.org/drawingml/2006/main" xmlns:p="http://schemas.openxmlformats.org/presentationml/2006/main" xmlns:r="http://schemas.openxmlformats.org/officeDocument/2006/relationships">
+<p:sld xmlns:a="http://schemas.openxmlformats.org/drawingml/2006/main" xmlns:r="http://schemas.openxmlformats.org/officeDocument/2006/relationships" xmlns:p="http://schemas.openxmlformats.org/presentationml/2006/main">
   <p:cSld>
     <p:spTree>
       <p:nvGrpSpPr>
@@ -8743,7 +8775,14 @@
         <p:cNvGrpSpPr/>
         <p:nvPr/>
       </p:nvGrpSpPr>
-      <p:grpSpPr/>
+      <p:grpSpPr>
+        <a:xfrm>
+          <a:off x="0" y="0"/>
+          <a:ext cx="0" cy="0"/>
+          <a:chOff x="0" y="0"/>
+          <a:chExt cx="0" cy="0"/>
+        </a:xfrm>
+      </p:grpSpPr>
       <p:sp>
         <p:nvSpPr>
           <p:cNvPr id="2" name="TextBox 1"/>
@@ -8818,6 +8857,7 @@
           <a:lstStyle/>
           <a:p>
             <a:pPr algn="ctr"/>
+            <a:endParaRPr/>
           </a:p>
         </p:txBody>
       </p:sp>
@@ -8857,7 +8897,7 @@
           </a:fontRef>
         </p:style>
         <p:txBody>
-          <a:bodyPr rtlCol="0" anchor="ctr" wrap="none"/>
+          <a:bodyPr wrap="none" rtlCol="0" anchor="ctr"/>
           <a:lstStyle/>
           <a:p>
             <a:pPr algn="ctr"/>
@@ -8989,14 +9029,11 @@
                 <a:spcPts val="200"/>
               </a:spcBef>
             </a:pPr>
-            <a:r>
-              <a:rPr sz="1400" b="0">
-                <a:solidFill>
-                  <a:srgbClr val="404040"/>
-                </a:solidFill>
-              </a:rPr>
-              <a:t/>
-            </a:r>
+            <a:endParaRPr sz="1400" b="0">
+              <a:solidFill>
+                <a:srgbClr val="404040"/>
+              </a:solidFill>
+            </a:endParaRPr>
           </a:p>
           <a:p>
             <a:pPr algn="l">
@@ -9078,7 +9115,7 @@
 </file>
 
 <file path=ppt/slides/slide22.xml><?xml version="1.0" encoding="utf-8"?>
-<p:sld xmlns:a="http://schemas.openxmlformats.org/drawingml/2006/main" xmlns:p="http://schemas.openxmlformats.org/presentationml/2006/main" xmlns:r="http://schemas.openxmlformats.org/officeDocument/2006/relationships">
+<p:sld xmlns:a="http://schemas.openxmlformats.org/drawingml/2006/main" xmlns:r="http://schemas.openxmlformats.org/officeDocument/2006/relationships" xmlns:p="http://schemas.openxmlformats.org/presentationml/2006/main">
   <p:cSld>
     <p:spTree>
       <p:nvGrpSpPr>
@@ -9086,7 +9123,14 @@
         <p:cNvGrpSpPr/>
         <p:nvPr/>
       </p:nvGrpSpPr>
-      <p:grpSpPr/>
+      <p:grpSpPr>
+        <a:xfrm>
+          <a:off x="0" y="0"/>
+          <a:ext cx="0" cy="0"/>
+          <a:chOff x="0" y="0"/>
+          <a:chExt cx="0" cy="0"/>
+        </a:xfrm>
+      </p:grpSpPr>
       <p:sp>
         <p:nvSpPr>
           <p:cNvPr id="2" name="TextBox 1"/>
@@ -9161,6 +9205,7 @@
           <a:lstStyle/>
           <a:p>
             <a:pPr algn="ctr"/>
+            <a:endParaRPr/>
           </a:p>
         </p:txBody>
       </p:sp>
@@ -9200,7 +9245,7 @@
           </a:fontRef>
         </p:style>
         <p:txBody>
-          <a:bodyPr rtlCol="0" anchor="ctr" wrap="none"/>
+          <a:bodyPr wrap="none" rtlCol="0" anchor="ctr"/>
           <a:lstStyle/>
           <a:p>
             <a:pPr algn="ctr"/>
@@ -9272,14 +9317,11 @@
                 <a:spcPts val="200"/>
               </a:spcBef>
             </a:pPr>
-            <a:r>
-              <a:rPr sz="1500" b="0">
-                <a:solidFill>
-                  <a:srgbClr val="404040"/>
-                </a:solidFill>
-              </a:rPr>
-              <a:t/>
-            </a:r>
+            <a:endParaRPr sz="1500" b="0">
+              <a:solidFill>
+                <a:srgbClr val="404040"/>
+              </a:solidFill>
+            </a:endParaRPr>
           </a:p>
           <a:p>
             <a:pPr algn="l">
@@ -9361,7 +9403,7 @@
 </file>
 
 <file path=ppt/slides/slide23.xml><?xml version="1.0" encoding="utf-8"?>
-<p:sld xmlns:a="http://schemas.openxmlformats.org/drawingml/2006/main" xmlns:p="http://schemas.openxmlformats.org/presentationml/2006/main" xmlns:r="http://schemas.openxmlformats.org/officeDocument/2006/relationships">
+<p:sld xmlns:a="http://schemas.openxmlformats.org/drawingml/2006/main" xmlns:r="http://schemas.openxmlformats.org/officeDocument/2006/relationships" xmlns:p="http://schemas.openxmlformats.org/presentationml/2006/main">
   <p:cSld>
     <p:spTree>
       <p:nvGrpSpPr>
@@ -9369,7 +9411,14 @@
         <p:cNvGrpSpPr/>
         <p:nvPr/>
       </p:nvGrpSpPr>
-      <p:grpSpPr/>
+      <p:grpSpPr>
+        <a:xfrm>
+          <a:off x="0" y="0"/>
+          <a:ext cx="0" cy="0"/>
+          <a:chOff x="0" y="0"/>
+          <a:chExt cx="0" cy="0"/>
+        </a:xfrm>
+      </p:grpSpPr>
       <p:sp>
         <p:nvSpPr>
           <p:cNvPr id="2" name="Rectangle 1"/>
@@ -9406,7 +9455,7 @@
           </a:fontRef>
         </p:style>
         <p:txBody>
-          <a:bodyPr rtlCol="0" anchor="ctr" wrap="none"/>
+          <a:bodyPr wrap="none" rtlCol="0" anchor="ctr"/>
           <a:lstStyle/>
           <a:p>
             <a:pPr algn="ctr"/>
@@ -9461,6 +9510,7 @@
           <a:lstStyle/>
           <a:p>
             <a:pPr algn="ctr"/>
+            <a:endParaRPr/>
           </a:p>
         </p:txBody>
       </p:sp>
@@ -9507,7 +9557,7 @@
 </file>
 
 <file path=ppt/slides/slide24.xml><?xml version="1.0" encoding="utf-8"?>
-<p:sld xmlns:a="http://schemas.openxmlformats.org/drawingml/2006/main" xmlns:p="http://schemas.openxmlformats.org/presentationml/2006/main" xmlns:r="http://schemas.openxmlformats.org/officeDocument/2006/relationships">
+<p:sld xmlns:a="http://schemas.openxmlformats.org/drawingml/2006/main" xmlns:r="http://schemas.openxmlformats.org/officeDocument/2006/relationships" xmlns:p="http://schemas.openxmlformats.org/presentationml/2006/main">
   <p:cSld>
     <p:spTree>
       <p:nvGrpSpPr>
@@ -9515,7 +9565,14 @@
         <p:cNvGrpSpPr/>
         <p:nvPr/>
       </p:nvGrpSpPr>
-      <p:grpSpPr/>
+      <p:grpSpPr>
+        <a:xfrm>
+          <a:off x="0" y="0"/>
+          <a:ext cx="0" cy="0"/>
+          <a:chOff x="0" y="0"/>
+          <a:chExt cx="0" cy="0"/>
+        </a:xfrm>
+      </p:grpSpPr>
       <p:sp>
         <p:nvSpPr>
           <p:cNvPr id="2" name="TextBox 1"/>
@@ -9590,6 +9647,7 @@
           <a:lstStyle/>
           <a:p>
             <a:pPr algn="ctr"/>
+            <a:endParaRPr/>
           </a:p>
         </p:txBody>
       </p:sp>
@@ -9629,7 +9687,7 @@
           </a:fontRef>
         </p:style>
         <p:txBody>
-          <a:bodyPr rtlCol="0" anchor="ctr" wrap="none"/>
+          <a:bodyPr wrap="none" rtlCol="0" anchor="ctr"/>
           <a:lstStyle/>
           <a:p>
             <a:pPr algn="ctr"/>
@@ -9701,14 +9759,11 @@
                 <a:spcPts val="200"/>
               </a:spcBef>
             </a:pPr>
-            <a:r>
-              <a:rPr sz="1600" b="0">
-                <a:solidFill>
-                  <a:srgbClr val="404040"/>
-                </a:solidFill>
-              </a:rPr>
-              <a:t/>
-            </a:r>
+            <a:endParaRPr sz="1600" b="0">
+              <a:solidFill>
+                <a:srgbClr val="404040"/>
+              </a:solidFill>
+            </a:endParaRPr>
           </a:p>
           <a:p>
             <a:pPr algn="l">
@@ -9775,7 +9830,7 @@
 </file>
 
 <file path=ppt/slides/slide25.xml><?xml version="1.0" encoding="utf-8"?>
-<p:sld xmlns:a="http://schemas.openxmlformats.org/drawingml/2006/main" xmlns:p="http://schemas.openxmlformats.org/presentationml/2006/main" xmlns:r="http://schemas.openxmlformats.org/officeDocument/2006/relationships">
+<p:sld xmlns:a="http://schemas.openxmlformats.org/drawingml/2006/main" xmlns:r="http://schemas.openxmlformats.org/officeDocument/2006/relationships" xmlns:p="http://schemas.openxmlformats.org/presentationml/2006/main">
   <p:cSld>
     <p:spTree>
       <p:nvGrpSpPr>
@@ -9783,7 +9838,14 @@
         <p:cNvGrpSpPr/>
         <p:nvPr/>
       </p:nvGrpSpPr>
-      <p:grpSpPr/>
+      <p:grpSpPr>
+        <a:xfrm>
+          <a:off x="0" y="0"/>
+          <a:ext cx="0" cy="0"/>
+          <a:chOff x="0" y="0"/>
+          <a:chExt cx="0" cy="0"/>
+        </a:xfrm>
+      </p:grpSpPr>
       <p:sp>
         <p:nvSpPr>
           <p:cNvPr id="2" name="TextBox 1"/>
@@ -9858,6 +9920,7 @@
           <a:lstStyle/>
           <a:p>
             <a:pPr algn="ctr"/>
+            <a:endParaRPr/>
           </a:p>
         </p:txBody>
       </p:sp>
@@ -9897,7 +9960,7 @@
           </a:fontRef>
         </p:style>
         <p:txBody>
-          <a:bodyPr rtlCol="0" anchor="ctr" wrap="none"/>
+          <a:bodyPr wrap="none" rtlCol="0" anchor="ctr"/>
           <a:lstStyle/>
           <a:p>
             <a:pPr algn="ctr"/>
@@ -9954,14 +10017,11 @@
                 <a:spcPts val="200"/>
               </a:spcBef>
             </a:pPr>
-            <a:r>
-              <a:rPr sz="1500" b="0">
-                <a:solidFill>
-                  <a:srgbClr val="404040"/>
-                </a:solidFill>
-              </a:rPr>
-              <a:t/>
-            </a:r>
+            <a:endParaRPr sz="1500" b="0">
+              <a:solidFill>
+                <a:srgbClr val="404040"/>
+              </a:solidFill>
+            </a:endParaRPr>
           </a:p>
           <a:p>
             <a:pPr algn="l">
@@ -10088,7 +10148,7 @@
 </file>
 
 <file path=ppt/slides/slide26.xml><?xml version="1.0" encoding="utf-8"?>
-<p:sld xmlns:a="http://schemas.openxmlformats.org/drawingml/2006/main" xmlns:p="http://schemas.openxmlformats.org/presentationml/2006/main" xmlns:r="http://schemas.openxmlformats.org/officeDocument/2006/relationships">
+<p:sld xmlns:a="http://schemas.openxmlformats.org/drawingml/2006/main" xmlns:r="http://schemas.openxmlformats.org/officeDocument/2006/relationships" xmlns:p="http://schemas.openxmlformats.org/presentationml/2006/main">
   <p:cSld>
     <p:spTree>
       <p:nvGrpSpPr>
@@ -10096,7 +10156,14 @@
         <p:cNvGrpSpPr/>
         <p:nvPr/>
       </p:nvGrpSpPr>
-      <p:grpSpPr/>
+      <p:grpSpPr>
+        <a:xfrm>
+          <a:off x="0" y="0"/>
+          <a:ext cx="0" cy="0"/>
+          <a:chOff x="0" y="0"/>
+          <a:chExt cx="0" cy="0"/>
+        </a:xfrm>
+      </p:grpSpPr>
       <p:sp>
         <p:nvSpPr>
           <p:cNvPr id="2" name="TextBox 1"/>
@@ -10171,6 +10238,7 @@
           <a:lstStyle/>
           <a:p>
             <a:pPr algn="ctr"/>
+            <a:endParaRPr/>
           </a:p>
         </p:txBody>
       </p:sp>
@@ -10210,7 +10278,7 @@
           </a:fontRef>
         </p:style>
         <p:txBody>
-          <a:bodyPr rtlCol="0" anchor="ctr" wrap="none"/>
+          <a:bodyPr wrap="none" rtlCol="0" anchor="ctr"/>
           <a:lstStyle/>
           <a:p>
             <a:pPr algn="ctr"/>
@@ -10267,14 +10335,11 @@
                 <a:spcPts val="200"/>
               </a:spcBef>
             </a:pPr>
-            <a:r>
-              <a:rPr sz="1600" b="0">
-                <a:solidFill>
-                  <a:srgbClr val="404040"/>
-                </a:solidFill>
-              </a:rPr>
-              <a:t/>
-            </a:r>
+            <a:endParaRPr sz="1600" b="1">
+              <a:solidFill>
+                <a:srgbClr val="0070C0"/>
+              </a:solidFill>
+            </a:endParaRPr>
           </a:p>
           <a:p>
             <a:pPr algn="l">
@@ -10386,7 +10451,7 @@
 </file>
 
 <file path=ppt/slides/slide27.xml><?xml version="1.0" encoding="utf-8"?>
-<p:sld xmlns:a="http://schemas.openxmlformats.org/drawingml/2006/main" xmlns:p="http://schemas.openxmlformats.org/presentationml/2006/main" xmlns:r="http://schemas.openxmlformats.org/officeDocument/2006/relationships">
+<p:sld xmlns:a="http://schemas.openxmlformats.org/drawingml/2006/main" xmlns:r="http://schemas.openxmlformats.org/officeDocument/2006/relationships" xmlns:p="http://schemas.openxmlformats.org/presentationml/2006/main">
   <p:cSld>
     <p:spTree>
       <p:nvGrpSpPr>
@@ -10394,7 +10459,14 @@
         <p:cNvGrpSpPr/>
         <p:nvPr/>
       </p:nvGrpSpPr>
-      <p:grpSpPr/>
+      <p:grpSpPr>
+        <a:xfrm>
+          <a:off x="0" y="0"/>
+          <a:ext cx="0" cy="0"/>
+          <a:chOff x="0" y="0"/>
+          <a:chExt cx="0" cy="0"/>
+        </a:xfrm>
+      </p:grpSpPr>
       <p:sp>
         <p:nvSpPr>
           <p:cNvPr id="2" name="Rectangle 1"/>
@@ -10431,7 +10503,7 @@
           </a:fontRef>
         </p:style>
         <p:txBody>
-          <a:bodyPr rtlCol="0" anchor="ctr" wrap="none"/>
+          <a:bodyPr wrap="none" rtlCol="0" anchor="ctr"/>
           <a:lstStyle/>
           <a:p>
             <a:pPr algn="ctr"/>
@@ -10486,6 +10558,7 @@
           <a:lstStyle/>
           <a:p>
             <a:pPr algn="ctr"/>
+            <a:endParaRPr/>
           </a:p>
         </p:txBody>
       </p:sp>
@@ -10532,7 +10605,7 @@
 </file>
 
 <file path=ppt/slides/slide28.xml><?xml version="1.0" encoding="utf-8"?>
-<p:sld xmlns:a="http://schemas.openxmlformats.org/drawingml/2006/main" xmlns:p="http://schemas.openxmlformats.org/presentationml/2006/main" xmlns:r="http://schemas.openxmlformats.org/officeDocument/2006/relationships">
+<p:sld xmlns:a="http://schemas.openxmlformats.org/drawingml/2006/main" xmlns:r="http://schemas.openxmlformats.org/officeDocument/2006/relationships" xmlns:p="http://schemas.openxmlformats.org/presentationml/2006/main">
   <p:cSld>
     <p:spTree>
       <p:nvGrpSpPr>
@@ -10540,7 +10613,14 @@
         <p:cNvGrpSpPr/>
         <p:nvPr/>
       </p:nvGrpSpPr>
-      <p:grpSpPr/>
+      <p:grpSpPr>
+        <a:xfrm>
+          <a:off x="0" y="0"/>
+          <a:ext cx="0" cy="0"/>
+          <a:chOff x="0" y="0"/>
+          <a:chExt cx="0" cy="0"/>
+        </a:xfrm>
+      </p:grpSpPr>
       <p:sp>
         <p:nvSpPr>
           <p:cNvPr id="2" name="TextBox 1"/>
@@ -10615,6 +10695,7 @@
           <a:lstStyle/>
           <a:p>
             <a:pPr algn="ctr"/>
+            <a:endParaRPr/>
           </a:p>
         </p:txBody>
       </p:sp>
@@ -10654,7 +10735,7 @@
           </a:fontRef>
         </p:style>
         <p:txBody>
-          <a:bodyPr rtlCol="0" anchor="ctr" wrap="none"/>
+          <a:bodyPr wrap="none" rtlCol="0" anchor="ctr"/>
           <a:lstStyle/>
           <a:p>
             <a:pPr algn="ctr"/>
@@ -10741,28 +10822,40 @@
                 <a:spcPts val="200"/>
               </a:spcBef>
             </a:pPr>
+            <a:endParaRPr sz="1400" b="0">
+              <a:solidFill>
+                <a:srgbClr val="404040"/>
+              </a:solidFill>
+            </a:endParaRPr>
+          </a:p>
+          <a:p>
+            <a:pPr algn="l">
+              <a:spcBef>
+                <a:spcPts val="200"/>
+              </a:spcBef>
+            </a:pPr>
+            <a:r>
+              <a:rPr sz="1400" b="1">
+                <a:solidFill>
+                  <a:srgbClr val="0070C0"/>
+                </a:solidFill>
+              </a:rPr>
+              <a:t>STEP 2: Install Python Libraries</a:t>
+            </a:r>
+          </a:p>
+          <a:p>
+            <a:pPr algn="l">
+              <a:spcBef>
+                <a:spcPts val="200"/>
+              </a:spcBef>
+            </a:pPr>
             <a:r>
               <a:rPr sz="1400" b="0">
                 <a:solidFill>
                   <a:srgbClr val="404040"/>
                 </a:solidFill>
               </a:rPr>
-              <a:t/>
-            </a:r>
-          </a:p>
-          <a:p>
-            <a:pPr algn="l">
-              <a:spcBef>
-                <a:spcPts val="200"/>
-              </a:spcBef>
-            </a:pPr>
-            <a:r>
-              <a:rPr sz="1400" b="1">
-                <a:solidFill>
-                  <a:srgbClr val="0070C0"/>
-                </a:solidFill>
-              </a:rPr>
-              <a:t>STEP 2: Install Python Libraries</a:t>
+              <a:t>   Open terminal inside the 'backend' folder</a:t>
             </a:r>
           </a:p>
           <a:p>
@@ -10774,21 +10867,6 @@
             <a:r>
               <a:rPr sz="1400" b="0">
                 <a:solidFill>
-                  <a:srgbClr val="404040"/>
-                </a:solidFill>
-              </a:rPr>
-              <a:t>   Open terminal inside the 'backend' folder</a:t>
-            </a:r>
-          </a:p>
-          <a:p>
-            <a:pPr algn="l">
-              <a:spcBef>
-                <a:spcPts val="200"/>
-              </a:spcBef>
-            </a:pPr>
-            <a:r>
-              <a:rPr sz="1400" b="0">
-                <a:solidFill>
                   <a:srgbClr val="0D47A1"/>
                 </a:solidFill>
               </a:rPr>
@@ -10801,14 +10879,11 @@
                 <a:spcPts val="200"/>
               </a:spcBef>
             </a:pPr>
-            <a:r>
-              <a:rPr sz="1400" b="0">
-                <a:solidFill>
-                  <a:srgbClr val="404040"/>
-                </a:solidFill>
-              </a:rPr>
-              <a:t/>
-            </a:r>
+            <a:endParaRPr sz="1400" b="0">
+              <a:solidFill>
+                <a:srgbClr val="0D47A1"/>
+              </a:solidFill>
+            </a:endParaRPr>
           </a:p>
           <a:p>
             <a:pPr algn="l">
@@ -10944,28 +11019,40 @@
                 <a:spcPts val="200"/>
               </a:spcBef>
             </a:pPr>
+            <a:endParaRPr sz="1400" b="0">
+              <a:solidFill>
+                <a:srgbClr val="404040"/>
+              </a:solidFill>
+            </a:endParaRPr>
+          </a:p>
+          <a:p>
+            <a:pPr algn="l">
+              <a:spcBef>
+                <a:spcPts val="200"/>
+              </a:spcBef>
+            </a:pPr>
+            <a:r>
+              <a:rPr sz="1400" b="1">
+                <a:solidFill>
+                  <a:srgbClr val="0070C0"/>
+                </a:solidFill>
+              </a:rPr>
+              <a:t>STEP 5: Start the Frontend Website</a:t>
+            </a:r>
+          </a:p>
+          <a:p>
+            <a:pPr algn="l">
+              <a:spcBef>
+                <a:spcPts val="200"/>
+              </a:spcBef>
+            </a:pPr>
             <a:r>
               <a:rPr sz="1400" b="0">
                 <a:solidFill>
                   <a:srgbClr val="404040"/>
                 </a:solidFill>
               </a:rPr>
-              <a:t/>
-            </a:r>
-          </a:p>
-          <a:p>
-            <a:pPr algn="l">
-              <a:spcBef>
-                <a:spcPts val="200"/>
-              </a:spcBef>
-            </a:pPr>
-            <a:r>
-              <a:rPr sz="1400" b="1">
-                <a:solidFill>
-                  <a:srgbClr val="0070C0"/>
-                </a:solidFill>
-              </a:rPr>
-              <a:t>STEP 5: Start the Frontend Website</a:t>
+              <a:t>   In 'bug-detector' folder terminal, run:</a:t>
             </a:r>
           </a:p>
           <a:p>
@@ -10977,39 +11064,24 @@
             <a:r>
               <a:rPr sz="1400" b="0">
                 <a:solidFill>
+                  <a:srgbClr val="0D47A1"/>
+                </a:solidFill>
+              </a:rPr>
+              <a:t>   npm start</a:t>
+            </a:r>
+          </a:p>
+          <a:p>
+            <a:pPr algn="l">
+              <a:spcBef>
+                <a:spcPts val="200"/>
+              </a:spcBef>
+            </a:pPr>
+            <a:r>
+              <a:rPr sz="1400" b="0">
+                <a:solidFill>
                   <a:srgbClr val="404040"/>
                 </a:solidFill>
               </a:rPr>
-              <a:t>   In 'bug-detector' folder terminal, run:</a:t>
-            </a:r>
-          </a:p>
-          <a:p>
-            <a:pPr algn="l">
-              <a:spcBef>
-                <a:spcPts val="200"/>
-              </a:spcBef>
-            </a:pPr>
-            <a:r>
-              <a:rPr sz="1400" b="0">
-                <a:solidFill>
-                  <a:srgbClr val="0D47A1"/>
-                </a:solidFill>
-              </a:rPr>
-              <a:t>   npm start</a:t>
-            </a:r>
-          </a:p>
-          <a:p>
-            <a:pPr algn="l">
-              <a:spcBef>
-                <a:spcPts val="200"/>
-              </a:spcBef>
-            </a:pPr>
-            <a:r>
-              <a:rPr sz="1400" b="0">
-                <a:solidFill>
-                  <a:srgbClr val="404040"/>
-                </a:solidFill>
-              </a:rPr>
               <a:t>   Opens at: http://localhost:3000</a:t>
             </a:r>
           </a:p>
@@ -11019,14 +11091,11 @@
                 <a:spcPts val="200"/>
               </a:spcBef>
             </a:pPr>
-            <a:r>
-              <a:rPr sz="1400" b="0">
-                <a:solidFill>
-                  <a:srgbClr val="404040"/>
-                </a:solidFill>
-              </a:rPr>
-              <a:t/>
-            </a:r>
+            <a:endParaRPr sz="1400" b="0">
+              <a:solidFill>
+                <a:srgbClr val="404040"/>
+              </a:solidFill>
+            </a:endParaRPr>
           </a:p>
           <a:p>
             <a:pPr algn="l">
@@ -11115,6 +11184,7 @@
           <a:lstStyle/>
           <a:p>
             <a:pPr algn="ctr"/>
+            <a:endParaRPr/>
           </a:p>
         </p:txBody>
       </p:sp>
@@ -11127,7 +11197,7 @@
 </file>
 
 <file path=ppt/slides/slide29.xml><?xml version="1.0" encoding="utf-8"?>
-<p:sld xmlns:a="http://schemas.openxmlformats.org/drawingml/2006/main" xmlns:p="http://schemas.openxmlformats.org/presentationml/2006/main" xmlns:r="http://schemas.openxmlformats.org/officeDocument/2006/relationships">
+<p:sld xmlns:a="http://schemas.openxmlformats.org/drawingml/2006/main" xmlns:r="http://schemas.openxmlformats.org/officeDocument/2006/relationships" xmlns:p="http://schemas.openxmlformats.org/presentationml/2006/main">
   <p:cSld>
     <p:spTree>
       <p:nvGrpSpPr>
@@ -11135,7 +11205,14 @@
         <p:cNvGrpSpPr/>
         <p:nvPr/>
       </p:nvGrpSpPr>
-      <p:grpSpPr/>
+      <p:grpSpPr>
+        <a:xfrm>
+          <a:off x="0" y="0"/>
+          <a:ext cx="0" cy="0"/>
+          <a:chOff x="0" y="0"/>
+          <a:chExt cx="0" cy="0"/>
+        </a:xfrm>
+      </p:grpSpPr>
       <p:sp>
         <p:nvSpPr>
           <p:cNvPr id="2" name="Rectangle 1"/>
@@ -11172,7 +11249,7 @@
           </a:fontRef>
         </p:style>
         <p:txBody>
-          <a:bodyPr rtlCol="0" anchor="ctr" wrap="none"/>
+          <a:bodyPr wrap="none" rtlCol="0" anchor="ctr"/>
           <a:lstStyle/>
           <a:p>
             <a:pPr algn="ctr"/>
@@ -11227,6 +11304,7 @@
           <a:lstStyle/>
           <a:p>
             <a:pPr algn="ctr"/>
+            <a:endParaRPr/>
           </a:p>
         </p:txBody>
       </p:sp>
@@ -11273,7 +11351,7 @@
 </file>
 
 <file path=ppt/slides/slide3.xml><?xml version="1.0" encoding="utf-8"?>
-<p:sld xmlns:a="http://schemas.openxmlformats.org/drawingml/2006/main" xmlns:p="http://schemas.openxmlformats.org/presentationml/2006/main" xmlns:r="http://schemas.openxmlformats.org/officeDocument/2006/relationships">
+<p:sld xmlns:a="http://schemas.openxmlformats.org/drawingml/2006/main" xmlns:r="http://schemas.openxmlformats.org/officeDocument/2006/relationships" xmlns:p="http://schemas.openxmlformats.org/presentationml/2006/main">
   <p:cSld>
     <p:spTree>
       <p:nvGrpSpPr>
@@ -11281,7 +11359,14 @@
         <p:cNvGrpSpPr/>
         <p:nvPr/>
       </p:nvGrpSpPr>
-      <p:grpSpPr/>
+      <p:grpSpPr>
+        <a:xfrm>
+          <a:off x="0" y="0"/>
+          <a:ext cx="0" cy="0"/>
+          <a:chOff x="0" y="0"/>
+          <a:chExt cx="0" cy="0"/>
+        </a:xfrm>
+      </p:grpSpPr>
       <p:sp>
         <p:nvSpPr>
           <p:cNvPr id="2" name="TextBox 1"/>
@@ -11356,6 +11441,7 @@
           <a:lstStyle/>
           <a:p>
             <a:pPr algn="ctr"/>
+            <a:endParaRPr/>
           </a:p>
         </p:txBody>
       </p:sp>
@@ -11395,7 +11481,7 @@
           </a:fontRef>
         </p:style>
         <p:txBody>
-          <a:bodyPr rtlCol="0" anchor="ctr" wrap="none"/>
+          <a:bodyPr wrap="none" rtlCol="0" anchor="ctr"/>
           <a:lstStyle/>
           <a:p>
             <a:pPr algn="ctr"/>
@@ -11577,7 +11663,7 @@
 </file>
 
 <file path=ppt/slides/slide30.xml><?xml version="1.0" encoding="utf-8"?>
-<p:sld xmlns:a="http://schemas.openxmlformats.org/drawingml/2006/main" xmlns:p="http://schemas.openxmlformats.org/presentationml/2006/main" xmlns:r="http://schemas.openxmlformats.org/officeDocument/2006/relationships">
+<p:sld xmlns:a="http://schemas.openxmlformats.org/drawingml/2006/main" xmlns:r="http://schemas.openxmlformats.org/officeDocument/2006/relationships" xmlns:p="http://schemas.openxmlformats.org/presentationml/2006/main">
   <p:cSld>
     <p:spTree>
       <p:nvGrpSpPr>
@@ -11585,7 +11671,14 @@
         <p:cNvGrpSpPr/>
         <p:nvPr/>
       </p:nvGrpSpPr>
-      <p:grpSpPr/>
+      <p:grpSpPr>
+        <a:xfrm>
+          <a:off x="0" y="0"/>
+          <a:ext cx="0" cy="0"/>
+          <a:chOff x="0" y="0"/>
+          <a:chExt cx="0" cy="0"/>
+        </a:xfrm>
+      </p:grpSpPr>
       <p:sp>
         <p:nvSpPr>
           <p:cNvPr id="2" name="TextBox 1"/>
@@ -11660,6 +11753,7 @@
           <a:lstStyle/>
           <a:p>
             <a:pPr algn="ctr"/>
+            <a:endParaRPr/>
           </a:p>
         </p:txBody>
       </p:sp>
@@ -11699,7 +11793,7 @@
           </a:fontRef>
         </p:style>
         <p:txBody>
-          <a:bodyPr rtlCol="0" anchor="ctr" wrap="none"/>
+          <a:bodyPr wrap="none" rtlCol="0" anchor="ctr"/>
           <a:lstStyle/>
           <a:p>
             <a:pPr algn="ctr"/>
@@ -11756,14 +11850,38 @@
                 <a:spcPts val="200"/>
               </a:spcBef>
             </a:pPr>
+            <a:endParaRPr sz="1600" b="0">
+              <a:solidFill>
+                <a:srgbClr val="404040"/>
+              </a:solidFill>
+            </a:endParaRPr>
+          </a:p>
+          <a:p>
+            <a:pPr algn="l">
+              <a:spcBef>
+                <a:spcPts val="200"/>
+              </a:spcBef>
+            </a:pPr>
             <a:r>
               <a:rPr sz="1600" b="0">
                 <a:solidFill>
                   <a:srgbClr val="404040"/>
                 </a:solidFill>
               </a:rPr>
-              <a:t/>
-            </a:r>
+              <a:t>Email Notifications    Automatically email developers when new bugs are found</a:t>
+            </a:r>
+          </a:p>
+          <a:p>
+            <a:pPr algn="l">
+              <a:spcBef>
+                <a:spcPts val="200"/>
+              </a:spcBef>
+            </a:pPr>
+            <a:endParaRPr sz="1600" b="0">
+              <a:solidFill>
+                <a:srgbClr val="404040"/>
+              </a:solidFill>
+            </a:endParaRPr>
           </a:p>
           <a:p>
             <a:pPr algn="l">
@@ -11777,8 +11895,20 @@
                   <a:srgbClr val="404040"/>
                 </a:solidFill>
               </a:rPr>
-              <a:t>Email Notifications    Automatically email developers when new bugs are found</a:t>
-            </a:r>
+              <a:t>GitHub Integration     Connect directly to code repositories for automatic scanning</a:t>
+            </a:r>
+          </a:p>
+          <a:p>
+            <a:pPr algn="l">
+              <a:spcBef>
+                <a:spcPts val="200"/>
+              </a:spcBef>
+            </a:pPr>
+            <a:endParaRPr sz="1600" b="0">
+              <a:solidFill>
+                <a:srgbClr val="404040"/>
+              </a:solidFill>
+            </a:endParaRPr>
           </a:p>
           <a:p>
             <a:pPr algn="l">
@@ -11792,8 +11922,20 @@
                   <a:srgbClr val="404040"/>
                 </a:solidFill>
               </a:rPr>
-              <a:t/>
-            </a:r>
+              <a:t>Mobile App             Access bug reports from your phone anytime</a:t>
+            </a:r>
+          </a:p>
+          <a:p>
+            <a:pPr algn="l">
+              <a:spcBef>
+                <a:spcPts val="200"/>
+              </a:spcBef>
+            </a:pPr>
+            <a:endParaRPr sz="1600" b="0">
+              <a:solidFill>
+                <a:srgbClr val="404040"/>
+              </a:solidFill>
+            </a:endParaRPr>
           </a:p>
           <a:p>
             <a:pPr algn="l">
@@ -11807,66 +11949,6 @@
                   <a:srgbClr val="404040"/>
                 </a:solidFill>
               </a:rPr>
-              <a:t>GitHub Integration     Connect directly to code repositories for automatic scanning</a:t>
-            </a:r>
-          </a:p>
-          <a:p>
-            <a:pPr algn="l">
-              <a:spcBef>
-                <a:spcPts val="200"/>
-              </a:spcBef>
-            </a:pPr>
-            <a:r>
-              <a:rPr sz="1600" b="0">
-                <a:solidFill>
-                  <a:srgbClr val="404040"/>
-                </a:solidFill>
-              </a:rPr>
-              <a:t/>
-            </a:r>
-          </a:p>
-          <a:p>
-            <a:pPr algn="l">
-              <a:spcBef>
-                <a:spcPts val="200"/>
-              </a:spcBef>
-            </a:pPr>
-            <a:r>
-              <a:rPr sz="1600" b="0">
-                <a:solidFill>
-                  <a:srgbClr val="404040"/>
-                </a:solidFill>
-              </a:rPr>
-              <a:t>Mobile App             Access bug reports from your phone anytime</a:t>
-            </a:r>
-          </a:p>
-          <a:p>
-            <a:pPr algn="l">
-              <a:spcBef>
-                <a:spcPts val="200"/>
-              </a:spcBef>
-            </a:pPr>
-            <a:r>
-              <a:rPr sz="1600" b="0">
-                <a:solidFill>
-                  <a:srgbClr val="404040"/>
-                </a:solidFill>
-              </a:rPr>
-              <a:t/>
-            </a:r>
-          </a:p>
-          <a:p>
-            <a:pPr algn="l">
-              <a:spcBef>
-                <a:spcPts val="200"/>
-              </a:spcBef>
-            </a:pPr>
-            <a:r>
-              <a:rPr sz="1600" b="0">
-                <a:solidFill>
-                  <a:srgbClr val="404040"/>
-                </a:solidFill>
-              </a:rPr>
               <a:t>More Languages         PHP, Ruby, Swift, Kotlin support</a:t>
             </a:r>
           </a:p>
@@ -11876,14 +11958,11 @@
                 <a:spcPts val="200"/>
               </a:spcBef>
             </a:pPr>
-            <a:r>
-              <a:rPr sz="1600" b="0">
-                <a:solidFill>
-                  <a:srgbClr val="404040"/>
-                </a:solidFill>
-              </a:rPr>
-              <a:t/>
-            </a:r>
+            <a:endParaRPr sz="1600" b="0">
+              <a:solidFill>
+                <a:srgbClr val="404040"/>
+              </a:solidFill>
+            </a:endParaRPr>
           </a:p>
           <a:p>
             <a:pPr algn="l">
@@ -11911,7 +11990,7 @@
 </file>
 
 <file path=ppt/slides/slide31.xml><?xml version="1.0" encoding="utf-8"?>
-<p:sld xmlns:a="http://schemas.openxmlformats.org/drawingml/2006/main" xmlns:p="http://schemas.openxmlformats.org/presentationml/2006/main" xmlns:r="http://schemas.openxmlformats.org/officeDocument/2006/relationships">
+<p:sld xmlns:a="http://schemas.openxmlformats.org/drawingml/2006/main" xmlns:r="http://schemas.openxmlformats.org/officeDocument/2006/relationships" xmlns:p="http://schemas.openxmlformats.org/presentationml/2006/main">
   <p:cSld>
     <p:spTree>
       <p:nvGrpSpPr>
@@ -11919,7 +11998,14 @@
         <p:cNvGrpSpPr/>
         <p:nvPr/>
       </p:nvGrpSpPr>
-      <p:grpSpPr/>
+      <p:grpSpPr>
+        <a:xfrm>
+          <a:off x="0" y="0"/>
+          <a:ext cx="0" cy="0"/>
+          <a:chOff x="0" y="0"/>
+          <a:chExt cx="0" cy="0"/>
+        </a:xfrm>
+      </p:grpSpPr>
       <p:sp>
         <p:nvSpPr>
           <p:cNvPr id="2" name="Rectangle 1"/>
@@ -11956,7 +12042,7 @@
           </a:fontRef>
         </p:style>
         <p:txBody>
-          <a:bodyPr rtlCol="0" anchor="ctr" wrap="none"/>
+          <a:bodyPr wrap="none" rtlCol="0" anchor="ctr"/>
           <a:lstStyle/>
           <a:p>
             <a:pPr algn="ctr"/>
@@ -12011,6 +12097,7 @@
           <a:lstStyle/>
           <a:p>
             <a:pPr algn="ctr"/>
+            <a:endParaRPr/>
           </a:p>
         </p:txBody>
       </p:sp>
@@ -12125,7 +12212,7 @@
 </file>
 
 <file path=ppt/slides/slide4.xml><?xml version="1.0" encoding="utf-8"?>
-<p:sld xmlns:a="http://schemas.openxmlformats.org/drawingml/2006/main" xmlns:p="http://schemas.openxmlformats.org/presentationml/2006/main" xmlns:r="http://schemas.openxmlformats.org/officeDocument/2006/relationships">
+<p:sld xmlns:a="http://schemas.openxmlformats.org/drawingml/2006/main" xmlns:r="http://schemas.openxmlformats.org/officeDocument/2006/relationships" xmlns:p="http://schemas.openxmlformats.org/presentationml/2006/main">
   <p:cSld>
     <p:spTree>
       <p:nvGrpSpPr>
@@ -12133,7 +12220,14 @@
         <p:cNvGrpSpPr/>
         <p:nvPr/>
       </p:nvGrpSpPr>
-      <p:grpSpPr/>
+      <p:grpSpPr>
+        <a:xfrm>
+          <a:off x="0" y="0"/>
+          <a:ext cx="0" cy="0"/>
+          <a:chOff x="0" y="0"/>
+          <a:chExt cx="0" cy="0"/>
+        </a:xfrm>
+      </p:grpSpPr>
       <p:sp>
         <p:nvSpPr>
           <p:cNvPr id="2" name="Rectangle 1"/>
@@ -12170,7 +12264,7 @@
           </a:fontRef>
         </p:style>
         <p:txBody>
-          <a:bodyPr rtlCol="0" anchor="ctr" wrap="none"/>
+          <a:bodyPr wrap="none" rtlCol="0" anchor="ctr"/>
           <a:lstStyle/>
           <a:p>
             <a:pPr algn="ctr"/>
@@ -12225,6 +12319,7 @@
           <a:lstStyle/>
           <a:p>
             <a:pPr algn="ctr"/>
+            <a:endParaRPr/>
           </a:p>
         </p:txBody>
       </p:sp>
@@ -12271,7 +12366,7 @@
 </file>
 
 <file path=ppt/slides/slide5.xml><?xml version="1.0" encoding="utf-8"?>
-<p:sld xmlns:a="http://schemas.openxmlformats.org/drawingml/2006/main" xmlns:p="http://schemas.openxmlformats.org/presentationml/2006/main" xmlns:r="http://schemas.openxmlformats.org/officeDocument/2006/relationships">
+<p:sld xmlns:a="http://schemas.openxmlformats.org/drawingml/2006/main" xmlns:r="http://schemas.openxmlformats.org/officeDocument/2006/relationships" xmlns:p="http://schemas.openxmlformats.org/presentationml/2006/main">
   <p:cSld>
     <p:spTree>
       <p:nvGrpSpPr>
@@ -12279,7 +12374,14 @@
         <p:cNvGrpSpPr/>
         <p:nvPr/>
       </p:nvGrpSpPr>
-      <p:grpSpPr/>
+      <p:grpSpPr>
+        <a:xfrm>
+          <a:off x="0" y="0"/>
+          <a:ext cx="0" cy="0"/>
+          <a:chOff x="0" y="0"/>
+          <a:chExt cx="0" cy="0"/>
+        </a:xfrm>
+      </p:grpSpPr>
       <p:sp>
         <p:nvSpPr>
           <p:cNvPr id="2" name="TextBox 1"/>
@@ -12354,6 +12456,7 @@
           <a:lstStyle/>
           <a:p>
             <a:pPr algn="ctr"/>
+            <a:endParaRPr/>
           </a:p>
         </p:txBody>
       </p:sp>
@@ -12393,7 +12496,7 @@
           </a:fontRef>
         </p:style>
         <p:txBody>
-          <a:bodyPr rtlCol="0" anchor="ctr" wrap="none"/>
+          <a:bodyPr wrap="none" rtlCol="0" anchor="ctr"/>
           <a:lstStyle/>
           <a:p>
             <a:pPr algn="ctr"/>
@@ -12450,14 +12553,38 @@
                 <a:spcPts val="200"/>
               </a:spcBef>
             </a:pPr>
+            <a:endParaRPr sz="1500" b="0">
+              <a:solidFill>
+                <a:srgbClr val="404040"/>
+              </a:solidFill>
+            </a:endParaRPr>
+          </a:p>
+          <a:p>
+            <a:pPr algn="l">
+              <a:spcBef>
+                <a:spcPts val="200"/>
+              </a:spcBef>
+            </a:pPr>
             <a:r>
               <a:rPr sz="1500" b="0">
                 <a:solidFill>
                   <a:srgbClr val="404040"/>
                 </a:solidFill>
               </a:rPr>
-              <a:t/>
-            </a:r>
+              <a:t>A developer or QA engineer uploads their code file or log file to the platform.</a:t>
+            </a:r>
+          </a:p>
+          <a:p>
+            <a:pPr algn="l">
+              <a:spcBef>
+                <a:spcPts val="200"/>
+              </a:spcBef>
+            </a:pPr>
+            <a:endParaRPr sz="1500" b="0">
+              <a:solidFill>
+                <a:srgbClr val="404040"/>
+              </a:solidFill>
+            </a:endParaRPr>
           </a:p>
           <a:p>
             <a:pPr algn="l">
@@ -12471,7 +12598,7 @@
                   <a:srgbClr val="404040"/>
                 </a:solidFill>
               </a:rPr>
-              <a:t>A developer or QA engineer uploads their code file or log file to the platform.</a:t>
+              <a:t>The AI instantly scans the file and tells you:</a:t>
             </a:r>
           </a:p>
           <a:p>
@@ -12486,7 +12613,7 @@
                   <a:srgbClr val="404040"/>
                 </a:solidFill>
               </a:rPr>
-              <a:t/>
+              <a:t>   Type of bug  (Crash / Logical / Performance / UI)</a:t>
             </a:r>
           </a:p>
           <a:p>
@@ -12501,7 +12628,7 @@
                   <a:srgbClr val="404040"/>
                 </a:solidFill>
               </a:rPr>
-              <a:t>The AI instantly scans the file and tells you:</a:t>
+              <a:t>   How serious it is  (Critical / High / Medium / Low)</a:t>
             </a:r>
           </a:p>
           <a:p>
@@ -12516,7 +12643,7 @@
                   <a:srgbClr val="404040"/>
                 </a:solidFill>
               </a:rPr>
-              <a:t>   Type of bug  (Crash / Logical / Performance / UI)</a:t>
+              <a:t>   Which line of code has the problem</a:t>
             </a:r>
           </a:p>
           <a:p>
@@ -12531,7 +12658,7 @@
                   <a:srgbClr val="404040"/>
                 </a:solidFill>
               </a:rPr>
-              <a:t>   How serious it is  (Critical / High / Medium / Low)</a:t>
+              <a:t>   How to fix it</a:t>
             </a:r>
           </a:p>
           <a:p>
@@ -12546,36 +12673,6 @@
                   <a:srgbClr val="404040"/>
                 </a:solidFill>
               </a:rPr>
-              <a:t>   Which line of code has the problem</a:t>
-            </a:r>
-          </a:p>
-          <a:p>
-            <a:pPr algn="l">
-              <a:spcBef>
-                <a:spcPts val="200"/>
-              </a:spcBef>
-            </a:pPr>
-            <a:r>
-              <a:rPr sz="1500" b="0">
-                <a:solidFill>
-                  <a:srgbClr val="404040"/>
-                </a:solidFill>
-              </a:rPr>
-              <a:t>   How to fix it</a:t>
-            </a:r>
-          </a:p>
-          <a:p>
-            <a:pPr algn="l">
-              <a:spcBef>
-                <a:spcPts val="200"/>
-              </a:spcBef>
-            </a:pPr>
-            <a:r>
-              <a:rPr sz="1500" b="0">
-                <a:solidFill>
-                  <a:srgbClr val="404040"/>
-                </a:solidFill>
-              </a:rPr>
               <a:t>   Who is responsible for fixing it</a:t>
             </a:r>
           </a:p>
@@ -12585,14 +12682,11 @@
                 <a:spcPts val="200"/>
               </a:spcBef>
             </a:pPr>
-            <a:r>
-              <a:rPr sz="1500" b="0">
-                <a:solidFill>
-                  <a:srgbClr val="404040"/>
-                </a:solidFill>
-              </a:rPr>
-              <a:t/>
-            </a:r>
+            <a:endParaRPr sz="1500" b="0">
+              <a:solidFill>
+                <a:srgbClr val="404040"/>
+              </a:solidFill>
+            </a:endParaRPr>
           </a:p>
           <a:p>
             <a:pPr algn="l">
@@ -12644,7 +12738,7 @@
 </file>
 
 <file path=ppt/slides/slide6.xml><?xml version="1.0" encoding="utf-8"?>
-<p:sld xmlns:a="http://schemas.openxmlformats.org/drawingml/2006/main" xmlns:p="http://schemas.openxmlformats.org/presentationml/2006/main" xmlns:r="http://schemas.openxmlformats.org/officeDocument/2006/relationships">
+<p:sld xmlns:a="http://schemas.openxmlformats.org/drawingml/2006/main" xmlns:r="http://schemas.openxmlformats.org/officeDocument/2006/relationships" xmlns:p="http://schemas.openxmlformats.org/presentationml/2006/main">
   <p:cSld>
     <p:spTree>
       <p:nvGrpSpPr>
@@ -12652,7 +12746,14 @@
         <p:cNvGrpSpPr/>
         <p:nvPr/>
       </p:nvGrpSpPr>
-      <p:grpSpPr/>
+      <p:grpSpPr>
+        <a:xfrm>
+          <a:off x="0" y="0"/>
+          <a:ext cx="0" cy="0"/>
+          <a:chOff x="0" y="0"/>
+          <a:chExt cx="0" cy="0"/>
+        </a:xfrm>
+      </p:grpSpPr>
       <p:sp>
         <p:nvSpPr>
           <p:cNvPr id="2" name="Rectangle 1"/>
@@ -12689,7 +12790,7 @@
           </a:fontRef>
         </p:style>
         <p:txBody>
-          <a:bodyPr rtlCol="0" anchor="ctr" wrap="none"/>
+          <a:bodyPr wrap="none" rtlCol="0" anchor="ctr"/>
           <a:lstStyle/>
           <a:p>
             <a:pPr algn="ctr"/>
@@ -12744,6 +12845,7 @@
           <a:lstStyle/>
           <a:p>
             <a:pPr algn="ctr"/>
+            <a:endParaRPr/>
           </a:p>
         </p:txBody>
       </p:sp>
@@ -12790,7 +12892,7 @@
 </file>
 
 <file path=ppt/slides/slide7.xml><?xml version="1.0" encoding="utf-8"?>
-<p:sld xmlns:a="http://schemas.openxmlformats.org/drawingml/2006/main" xmlns:p="http://schemas.openxmlformats.org/presentationml/2006/main" xmlns:r="http://schemas.openxmlformats.org/officeDocument/2006/relationships">
+<p:sld xmlns:a="http://schemas.openxmlformats.org/drawingml/2006/main" xmlns:r="http://schemas.openxmlformats.org/officeDocument/2006/relationships" xmlns:p="http://schemas.openxmlformats.org/presentationml/2006/main">
   <p:cSld>
     <p:spTree>
       <p:nvGrpSpPr>
@@ -12798,7 +12900,14 @@
         <p:cNvGrpSpPr/>
         <p:nvPr/>
       </p:nvGrpSpPr>
-      <p:grpSpPr/>
+      <p:grpSpPr>
+        <a:xfrm>
+          <a:off x="0" y="0"/>
+          <a:ext cx="0" cy="0"/>
+          <a:chOff x="0" y="0"/>
+          <a:chExt cx="0" cy="0"/>
+        </a:xfrm>
+      </p:grpSpPr>
       <p:sp>
         <p:nvSpPr>
           <p:cNvPr id="2" name="TextBox 1"/>
@@ -12873,6 +12982,7 @@
           <a:lstStyle/>
           <a:p>
             <a:pPr algn="ctr"/>
+            <a:endParaRPr/>
           </a:p>
         </p:txBody>
       </p:sp>
@@ -12912,7 +13022,7 @@
           </a:fontRef>
         </p:style>
         <p:txBody>
-          <a:bodyPr rtlCol="0" anchor="ctr" wrap="none"/>
+          <a:bodyPr wrap="none" rtlCol="0" anchor="ctr"/>
           <a:lstStyle/>
           <a:p>
             <a:pPr algn="ctr"/>
@@ -12969,14 +13079,38 @@
                 <a:spcPts val="200"/>
               </a:spcBef>
             </a:pPr>
+            <a:endParaRPr sz="1500" b="1">
+              <a:solidFill>
+                <a:srgbClr val="0070C0"/>
+              </a:solidFill>
+            </a:endParaRPr>
+          </a:p>
+          <a:p>
+            <a:pPr algn="l">
+              <a:spcBef>
+                <a:spcPts val="200"/>
+              </a:spcBef>
+            </a:pPr>
             <a:r>
               <a:rPr sz="1500" b="0">
                 <a:solidFill>
                   <a:srgbClr val="404040"/>
                 </a:solidFill>
               </a:rPr>
-              <a:t/>
-            </a:r>
+              <a:t>Developers manually read thousands of lines to find bugs.</a:t>
+            </a:r>
+          </a:p>
+          <a:p>
+            <a:pPr algn="l">
+              <a:spcBef>
+                <a:spcPts val="200"/>
+              </a:spcBef>
+            </a:pPr>
+            <a:endParaRPr sz="1500" b="0">
+              <a:solidFill>
+                <a:srgbClr val="404040"/>
+              </a:solidFill>
+            </a:endParaRPr>
           </a:p>
           <a:p>
             <a:pPr algn="l">
@@ -12990,8 +13124,20 @@
                   <a:srgbClr val="404040"/>
                 </a:solidFill>
               </a:rPr>
-              <a:t>Developers manually read thousands of lines to find bugs.</a:t>
-            </a:r>
+              <a:t>Takes days or weeks — very expensive.</a:t>
+            </a:r>
+          </a:p>
+          <a:p>
+            <a:pPr algn="l">
+              <a:spcBef>
+                <a:spcPts val="200"/>
+              </a:spcBef>
+            </a:pPr>
+            <a:endParaRPr sz="1500" b="0">
+              <a:solidFill>
+                <a:srgbClr val="404040"/>
+              </a:solidFill>
+            </a:endParaRPr>
           </a:p>
           <a:p>
             <a:pPr algn="l">
@@ -13005,51 +13151,6 @@
                   <a:srgbClr val="404040"/>
                 </a:solidFill>
               </a:rPr>
-              <a:t/>
-            </a:r>
-          </a:p>
-          <a:p>
-            <a:pPr algn="l">
-              <a:spcBef>
-                <a:spcPts val="200"/>
-              </a:spcBef>
-            </a:pPr>
-            <a:r>
-              <a:rPr sz="1500" b="0">
-                <a:solidFill>
-                  <a:srgbClr val="404040"/>
-                </a:solidFill>
-              </a:rPr>
-              <a:t>Takes days or weeks — very expensive.</a:t>
-            </a:r>
-          </a:p>
-          <a:p>
-            <a:pPr algn="l">
-              <a:spcBef>
-                <a:spcPts val="200"/>
-              </a:spcBef>
-            </a:pPr>
-            <a:r>
-              <a:rPr sz="1500" b="0">
-                <a:solidFill>
-                  <a:srgbClr val="404040"/>
-                </a:solidFill>
-              </a:rPr>
-              <a:t/>
-            </a:r>
-          </a:p>
-          <a:p>
-            <a:pPr algn="l">
-              <a:spcBef>
-                <a:spcPts val="200"/>
-              </a:spcBef>
-            </a:pPr>
-            <a:r>
-              <a:rPr sz="1500" b="0">
-                <a:solidFill>
-                  <a:srgbClr val="404040"/>
-                </a:solidFill>
-              </a:rPr>
               <a:t>Human reviewers miss many bugs in large projects.</a:t>
             </a:r>
           </a:p>
@@ -13059,14 +13160,11 @@
                 <a:spcPts val="200"/>
               </a:spcBef>
             </a:pPr>
-            <a:r>
-              <a:rPr sz="1500" b="0">
-                <a:solidFill>
-                  <a:srgbClr val="404040"/>
-                </a:solidFill>
-              </a:rPr>
-              <a:t/>
-            </a:r>
+            <a:endParaRPr sz="1500" b="0">
+              <a:solidFill>
+                <a:srgbClr val="404040"/>
+              </a:solidFill>
+            </a:endParaRPr>
           </a:p>
           <a:p>
             <a:pPr algn="l">
@@ -13127,14 +13225,38 @@
                 <a:spcPts val="200"/>
               </a:spcBef>
             </a:pPr>
+            <a:endParaRPr sz="1500" b="1">
+              <a:solidFill>
+                <a:srgbClr val="0070C0"/>
+              </a:solidFill>
+            </a:endParaRPr>
+          </a:p>
+          <a:p>
+            <a:pPr algn="l">
+              <a:spcBef>
+                <a:spcPts val="200"/>
+              </a:spcBef>
+            </a:pPr>
             <a:r>
               <a:rPr sz="1500" b="0">
                 <a:solidFill>
                   <a:srgbClr val="404040"/>
                 </a:solidFill>
               </a:rPr>
-              <a:t/>
-            </a:r>
+              <a:t>Upload any code file — AI scans it in seconds.</a:t>
+            </a:r>
+          </a:p>
+          <a:p>
+            <a:pPr algn="l">
+              <a:spcBef>
+                <a:spcPts val="200"/>
+              </a:spcBef>
+            </a:pPr>
+            <a:endParaRPr sz="1500" b="0">
+              <a:solidFill>
+                <a:srgbClr val="404040"/>
+              </a:solidFill>
+            </a:endParaRPr>
           </a:p>
           <a:p>
             <a:pPr algn="l">
@@ -13148,8 +13270,20 @@
                   <a:srgbClr val="404040"/>
                 </a:solidFill>
               </a:rPr>
-              <a:t>Upload any code file — AI scans it in seconds.</a:t>
-            </a:r>
+              <a:t>87% accuracy in detecting if a file has bugs.</a:t>
+            </a:r>
+          </a:p>
+          <a:p>
+            <a:pPr algn="l">
+              <a:spcBef>
+                <a:spcPts val="200"/>
+              </a:spcBef>
+            </a:pPr>
+            <a:endParaRPr sz="1500" b="0">
+              <a:solidFill>
+                <a:srgbClr val="404040"/>
+              </a:solidFill>
+            </a:endParaRPr>
           </a:p>
           <a:p>
             <a:pPr algn="l">
@@ -13163,51 +13297,6 @@
                   <a:srgbClr val="404040"/>
                 </a:solidFill>
               </a:rPr>
-              <a:t/>
-            </a:r>
-          </a:p>
-          <a:p>
-            <a:pPr algn="l">
-              <a:spcBef>
-                <a:spcPts val="200"/>
-              </a:spcBef>
-            </a:pPr>
-            <a:r>
-              <a:rPr sz="1500" b="0">
-                <a:solidFill>
-                  <a:srgbClr val="404040"/>
-                </a:solidFill>
-              </a:rPr>
-              <a:t>87% accuracy in detecting if a file has bugs.</a:t>
-            </a:r>
-          </a:p>
-          <a:p>
-            <a:pPr algn="l">
-              <a:spcBef>
-                <a:spcPts val="200"/>
-              </a:spcBef>
-            </a:pPr>
-            <a:r>
-              <a:rPr sz="1500" b="0">
-                <a:solidFill>
-                  <a:srgbClr val="404040"/>
-                </a:solidFill>
-              </a:rPr>
-              <a:t/>
-            </a:r>
-          </a:p>
-          <a:p>
-            <a:pPr algn="l">
-              <a:spcBef>
-                <a:spcPts val="200"/>
-              </a:spcBef>
-            </a:pPr>
-            <a:r>
-              <a:rPr sz="1500" b="0">
-                <a:solidFill>
-                  <a:srgbClr val="404040"/>
-                </a:solidFill>
-              </a:rPr>
               <a:t>99% accuracy in classifying the type of bug.</a:t>
             </a:r>
           </a:p>
@@ -13217,14 +13306,11 @@
                 <a:spcPts val="200"/>
               </a:spcBef>
             </a:pPr>
-            <a:r>
-              <a:rPr sz="1500" b="0">
-                <a:solidFill>
-                  <a:srgbClr val="404040"/>
-                </a:solidFill>
-              </a:rPr>
-              <a:t/>
-            </a:r>
+            <a:endParaRPr sz="1500" b="0">
+              <a:solidFill>
+                <a:srgbClr val="404040"/>
+              </a:solidFill>
+            </a:endParaRPr>
           </a:p>
           <a:p>
             <a:pPr algn="l">
@@ -13283,6 +13369,7 @@
           <a:lstStyle/>
           <a:p>
             <a:pPr algn="ctr"/>
+            <a:endParaRPr/>
           </a:p>
         </p:txBody>
       </p:sp>
@@ -13295,7 +13382,7 @@
 </file>
 
 <file path=ppt/slides/slide8.xml><?xml version="1.0" encoding="utf-8"?>
-<p:sld xmlns:a="http://schemas.openxmlformats.org/drawingml/2006/main" xmlns:p="http://schemas.openxmlformats.org/presentationml/2006/main" xmlns:r="http://schemas.openxmlformats.org/officeDocument/2006/relationships">
+<p:sld xmlns:a="http://schemas.openxmlformats.org/drawingml/2006/main" xmlns:r="http://schemas.openxmlformats.org/officeDocument/2006/relationships" xmlns:p="http://schemas.openxmlformats.org/presentationml/2006/main">
   <p:cSld>
     <p:spTree>
       <p:nvGrpSpPr>
@@ -13303,7 +13390,14 @@
         <p:cNvGrpSpPr/>
         <p:nvPr/>
       </p:nvGrpSpPr>
-      <p:grpSpPr/>
+      <p:grpSpPr>
+        <a:xfrm>
+          <a:off x="0" y="0"/>
+          <a:ext cx="0" cy="0"/>
+          <a:chOff x="0" y="0"/>
+          <a:chExt cx="0" cy="0"/>
+        </a:xfrm>
+      </p:grpSpPr>
       <p:sp>
         <p:nvSpPr>
           <p:cNvPr id="2" name="Rectangle 1"/>
@@ -13340,7 +13434,7 @@
           </a:fontRef>
         </p:style>
         <p:txBody>
-          <a:bodyPr rtlCol="0" anchor="ctr" wrap="none"/>
+          <a:bodyPr wrap="none" rtlCol="0" anchor="ctr"/>
           <a:lstStyle/>
           <a:p>
             <a:pPr algn="ctr"/>
@@ -13395,6 +13489,7 @@
           <a:lstStyle/>
           <a:p>
             <a:pPr algn="ctr"/>
+            <a:endParaRPr/>
           </a:p>
         </p:txBody>
       </p:sp>
@@ -13441,7 +13536,7 @@
 </file>
 
 <file path=ppt/slides/slide9.xml><?xml version="1.0" encoding="utf-8"?>
-<p:sld xmlns:a="http://schemas.openxmlformats.org/drawingml/2006/main" xmlns:p="http://schemas.openxmlformats.org/presentationml/2006/main" xmlns:r="http://schemas.openxmlformats.org/officeDocument/2006/relationships">
+<p:sld xmlns:a="http://schemas.openxmlformats.org/drawingml/2006/main" xmlns:r="http://schemas.openxmlformats.org/officeDocument/2006/relationships" xmlns:p="http://schemas.openxmlformats.org/presentationml/2006/main">
   <p:cSld>
     <p:spTree>
       <p:nvGrpSpPr>
@@ -13449,7 +13544,14 @@
         <p:cNvGrpSpPr/>
         <p:nvPr/>
       </p:nvGrpSpPr>
-      <p:grpSpPr/>
+      <p:grpSpPr>
+        <a:xfrm>
+          <a:off x="0" y="0"/>
+          <a:ext cx="0" cy="0"/>
+          <a:chOff x="0" y="0"/>
+          <a:chExt cx="0" cy="0"/>
+        </a:xfrm>
+      </p:grpSpPr>
       <p:sp>
         <p:nvSpPr>
           <p:cNvPr id="2" name="TextBox 1"/>
@@ -13524,6 +13626,7 @@
           <a:lstStyle/>
           <a:p>
             <a:pPr algn="ctr"/>
+            <a:endParaRPr/>
           </a:p>
         </p:txBody>
       </p:sp>
@@ -13563,7 +13666,7 @@
           </a:fontRef>
         </p:style>
         <p:txBody>
-          <a:bodyPr rtlCol="0" anchor="ctr" wrap="none"/>
+          <a:bodyPr wrap="none" rtlCol="0" anchor="ctr"/>
           <a:lstStyle/>
           <a:p>
             <a:pPr algn="ctr"/>
